--- a/GenAI/wk4-embedding-vectorDB-SemanticSearch-RAG/4_RAG_1_Intro_v2.pptx
+++ b/GenAI/wk4-embedding-vectorDB-SemanticSearch-RAG/4_RAG_1_Intro_v2.pptx
@@ -5,10 +5,10 @@
     <p:sldMasterId id="2147483648" r:id="rId1"/>
   </p:sldMasterIdLst>
   <p:notesMasterIdLst>
-    <p:notesMasterId r:id="rId17"/>
+    <p:notesMasterId r:id="rId18"/>
   </p:notesMasterIdLst>
   <p:handoutMasterIdLst>
-    <p:handoutMasterId r:id="rId18"/>
+    <p:handoutMasterId r:id="rId19"/>
   </p:handoutMasterIdLst>
   <p:sldIdLst>
     <p:sldId id="257" r:id="rId2"/>
@@ -16,16 +16,17 @@
     <p:sldId id="277" r:id="rId4"/>
     <p:sldId id="276" r:id="rId5"/>
     <p:sldId id="278" r:id="rId6"/>
-    <p:sldId id="287" r:id="rId7"/>
-    <p:sldId id="288" r:id="rId8"/>
-    <p:sldId id="284" r:id="rId9"/>
+    <p:sldId id="284" r:id="rId7"/>
+    <p:sldId id="287" r:id="rId8"/>
+    <p:sldId id="288" r:id="rId9"/>
     <p:sldId id="279" r:id="rId10"/>
-    <p:sldId id="280" r:id="rId11"/>
-    <p:sldId id="286" r:id="rId12"/>
-    <p:sldId id="285" r:id="rId13"/>
-    <p:sldId id="281" r:id="rId14"/>
-    <p:sldId id="283" r:id="rId15"/>
-    <p:sldId id="275" r:id="rId16"/>
+    <p:sldId id="289" r:id="rId11"/>
+    <p:sldId id="280" r:id="rId12"/>
+    <p:sldId id="286" r:id="rId13"/>
+    <p:sldId id="285" r:id="rId14"/>
+    <p:sldId id="281" r:id="rId15"/>
+    <p:sldId id="283" r:id="rId16"/>
+    <p:sldId id="275" r:id="rId17"/>
   </p:sldIdLst>
   <p:sldSz cx="12192000" cy="6858000"/>
   <p:notesSz cx="6858000" cy="9144000"/>
@@ -229,7 +230,7 @@
           <a:p>
             <a:fld id="{7BAEECA8-D063-486F-AE31-5020270C1449}" type="datetimeFigureOut">
               <a:rPr lang="en-US" smtClean="0"/>
-              <a:t>9/5/2026</a:t>
+              <a:t>9/11/2026</a:t>
             </a:fld>
             <a:endParaRPr lang="en-US"/>
           </a:p>
@@ -8950,7 +8951,7 @@
           <a:p>
             <a:fld id="{CB233BD1-3BA8-448D-9D08-7846095EA517}" type="datetimeFigureOut">
               <a:rPr lang="en-US" smtClean="0"/>
-              <a:t>9/5/2026</a:t>
+              <a:t>9/11/2026</a:t>
             </a:fld>
             <a:endParaRPr lang="en-US"/>
           </a:p>
@@ -9364,7 +9365,7 @@
           <a:p>
             <a:fld id="{6383FAE1-13DE-4511-8C1B-C8AFB720664C}" type="datetimeFigureOut">
               <a:rPr lang="en-US" smtClean="0"/>
-              <a:t>9/5/2026</a:t>
+              <a:t>9/11/2026</a:t>
             </a:fld>
             <a:endParaRPr lang="en-US"/>
           </a:p>
@@ -9562,7 +9563,7 @@
           <a:p>
             <a:fld id="{6383FAE1-13DE-4511-8C1B-C8AFB720664C}" type="datetimeFigureOut">
               <a:rPr lang="en-US" smtClean="0"/>
-              <a:t>9/5/2026</a:t>
+              <a:t>9/11/2026</a:t>
             </a:fld>
             <a:endParaRPr lang="en-US"/>
           </a:p>
@@ -9770,7 +9771,7 @@
           <a:p>
             <a:fld id="{6383FAE1-13DE-4511-8C1B-C8AFB720664C}" type="datetimeFigureOut">
               <a:rPr lang="en-US" smtClean="0"/>
-              <a:t>9/5/2026</a:t>
+              <a:t>9/11/2026</a:t>
             </a:fld>
             <a:endParaRPr lang="en-US"/>
           </a:p>
@@ -9968,7 +9969,7 @@
           <a:p>
             <a:fld id="{6383FAE1-13DE-4511-8C1B-C8AFB720664C}" type="datetimeFigureOut">
               <a:rPr lang="en-US" smtClean="0"/>
-              <a:t>9/5/2026</a:t>
+              <a:t>9/11/2026</a:t>
             </a:fld>
             <a:endParaRPr lang="en-US"/>
           </a:p>
@@ -10243,7 +10244,7 @@
           <a:p>
             <a:fld id="{6383FAE1-13DE-4511-8C1B-C8AFB720664C}" type="datetimeFigureOut">
               <a:rPr lang="en-US" smtClean="0"/>
-              <a:t>9/5/2026</a:t>
+              <a:t>9/11/2026</a:t>
             </a:fld>
             <a:endParaRPr lang="en-US"/>
           </a:p>
@@ -10508,7 +10509,7 @@
           <a:p>
             <a:fld id="{6383FAE1-13DE-4511-8C1B-C8AFB720664C}" type="datetimeFigureOut">
               <a:rPr lang="en-US" smtClean="0"/>
-              <a:t>9/5/2026</a:t>
+              <a:t>9/11/2026</a:t>
             </a:fld>
             <a:endParaRPr lang="en-US"/>
           </a:p>
@@ -10920,7 +10921,7 @@
           <a:p>
             <a:fld id="{6383FAE1-13DE-4511-8C1B-C8AFB720664C}" type="datetimeFigureOut">
               <a:rPr lang="en-US" smtClean="0"/>
-              <a:t>9/5/2026</a:t>
+              <a:t>9/11/2026</a:t>
             </a:fld>
             <a:endParaRPr lang="en-US"/>
           </a:p>
@@ -11061,7 +11062,7 @@
           <a:p>
             <a:fld id="{6383FAE1-13DE-4511-8C1B-C8AFB720664C}" type="datetimeFigureOut">
               <a:rPr lang="en-US" smtClean="0"/>
-              <a:t>9/5/2026</a:t>
+              <a:t>9/11/2026</a:t>
             </a:fld>
             <a:endParaRPr lang="en-US"/>
           </a:p>
@@ -11174,7 +11175,7 @@
           <a:p>
             <a:fld id="{6383FAE1-13DE-4511-8C1B-C8AFB720664C}" type="datetimeFigureOut">
               <a:rPr lang="en-US" smtClean="0"/>
-              <a:t>9/5/2026</a:t>
+              <a:t>9/11/2026</a:t>
             </a:fld>
             <a:endParaRPr lang="en-US"/>
           </a:p>
@@ -11485,7 +11486,7 @@
           <a:p>
             <a:fld id="{6383FAE1-13DE-4511-8C1B-C8AFB720664C}" type="datetimeFigureOut">
               <a:rPr lang="en-US" smtClean="0"/>
-              <a:t>9/5/2026</a:t>
+              <a:t>9/11/2026</a:t>
             </a:fld>
             <a:endParaRPr lang="en-US"/>
           </a:p>
@@ -11776,7 +11777,7 @@
           <a:p>
             <a:fld id="{6383FAE1-13DE-4511-8C1B-C8AFB720664C}" type="datetimeFigureOut">
               <a:rPr lang="en-US" smtClean="0"/>
-              <a:t>9/5/2026</a:t>
+              <a:t>9/11/2026</a:t>
             </a:fld>
             <a:endParaRPr lang="en-US"/>
           </a:p>
@@ -12020,7 +12021,7 @@
           <a:p>
             <a:fld id="{6383FAE1-13DE-4511-8C1B-C8AFB720664C}" type="datetimeFigureOut">
               <a:rPr lang="en-US" smtClean="0"/>
-              <a:t>9/5/2026</a:t>
+              <a:t>9/11/2026</a:t>
             </a:fld>
             <a:endParaRPr lang="en-US"/>
           </a:p>
@@ -12661,6 +12662,873 @@
         <p:cNvPr id="1" name="">
           <a:extLst>
             <a:ext uri="{FF2B5EF4-FFF2-40B4-BE49-F238E27FC236}">
+              <a16:creationId xmlns:a16="http://schemas.microsoft.com/office/drawing/2014/main" id="{EB2690DF-BB5A-27B6-C83D-95556FF5FCB3}"/>
+            </a:ext>
+          </a:extLst>
+        </p:cNvPr>
+        <p:cNvGrpSpPr/>
+        <p:nvPr/>
+      </p:nvGrpSpPr>
+      <p:grpSpPr>
+        <a:xfrm>
+          <a:off x="0" y="0"/>
+          <a:ext cx="0" cy="0"/>
+          <a:chOff x="0" y="0"/>
+          <a:chExt cx="0" cy="0"/>
+        </a:xfrm>
+      </p:grpSpPr>
+      <p:sp>
+        <p:nvSpPr>
+          <p:cNvPr id="9" name="TextBox 8">
+            <a:extLst>
+              <a:ext uri="{FF2B5EF4-FFF2-40B4-BE49-F238E27FC236}">
+                <a16:creationId xmlns:a16="http://schemas.microsoft.com/office/drawing/2014/main" id="{FBF3CD5B-D0F4-9909-05D6-D239545DF24E}"/>
+              </a:ext>
+            </a:extLst>
+          </p:cNvPr>
+          <p:cNvSpPr txBox="1"/>
+          <p:nvPr/>
+        </p:nvSpPr>
+        <p:spPr>
+          <a:xfrm>
+            <a:off x="230632" y="235680"/>
+            <a:ext cx="7102856" cy="461665"/>
+          </a:xfrm>
+          <a:prstGeom prst="rect">
+            <a:avLst/>
+          </a:prstGeom>
+          <a:noFill/>
+        </p:spPr>
+        <p:txBody>
+          <a:bodyPr wrap="square">
+            <a:spAutoFit/>
+          </a:bodyPr>
+          <a:lstStyle/>
+          <a:p>
+            <a:r>
+              <a:rPr lang="en-US" sz="2400" b="1" i="1" dirty="0">
+                <a:solidFill>
+                  <a:schemeClr val="accent6">
+                    <a:lumMod val="60000"/>
+                    <a:lumOff val="40000"/>
+                  </a:schemeClr>
+                </a:solidFill>
+              </a:rPr>
+              <a:t>Phase A – Ingestion (Populate The Vector DB)</a:t>
+            </a:r>
+          </a:p>
+        </p:txBody>
+      </p:sp>
+      <p:sp>
+        <p:nvSpPr>
+          <p:cNvPr id="5" name="TextBox 4">
+            <a:extLst>
+              <a:ext uri="{FF2B5EF4-FFF2-40B4-BE49-F238E27FC236}">
+                <a16:creationId xmlns:a16="http://schemas.microsoft.com/office/drawing/2014/main" id="{40FE4A01-1E5F-3DDD-E92B-98774DDD8E6C}"/>
+              </a:ext>
+            </a:extLst>
+          </p:cNvPr>
+          <p:cNvSpPr txBox="1"/>
+          <p:nvPr/>
+        </p:nvSpPr>
+        <p:spPr>
+          <a:xfrm>
+            <a:off x="2647188" y="1292412"/>
+            <a:ext cx="3140964" cy="1015663"/>
+          </a:xfrm>
+          <a:prstGeom prst="rect">
+            <a:avLst/>
+          </a:prstGeom>
+          <a:noFill/>
+        </p:spPr>
+        <p:txBody>
+          <a:bodyPr wrap="square">
+            <a:spAutoFit/>
+          </a:bodyPr>
+          <a:lstStyle/>
+          <a:p>
+            <a:r>
+              <a:rPr lang="en-US" sz="2000" b="1" dirty="0">
+                <a:solidFill>
+                  <a:schemeClr val="accent6">
+                    <a:lumMod val="60000"/>
+                    <a:lumOff val="40000"/>
+                  </a:schemeClr>
+                </a:solidFill>
+              </a:rPr>
+              <a:t>2. Chunking</a:t>
+            </a:r>
+          </a:p>
+          <a:p>
+            <a:r>
+              <a:rPr lang="en-US" sz="2000" dirty="0">
+                <a:solidFill>
+                  <a:schemeClr val="accent6">
+                    <a:lumMod val="60000"/>
+                    <a:lumOff val="40000"/>
+                  </a:schemeClr>
+                </a:solidFill>
+              </a:rPr>
+              <a:t>Break data into small pieces</a:t>
+            </a:r>
+          </a:p>
+          <a:p>
+            <a:r>
+              <a:rPr lang="en-US" sz="2000" dirty="0">
+                <a:solidFill>
+                  <a:schemeClr val="accent6">
+                    <a:lumMod val="60000"/>
+                    <a:lumOff val="40000"/>
+                  </a:schemeClr>
+                </a:solidFill>
+              </a:rPr>
+              <a:t> (chunks)</a:t>
+            </a:r>
+          </a:p>
+        </p:txBody>
+      </p:sp>
+      <p:sp>
+        <p:nvSpPr>
+          <p:cNvPr id="10" name="TextBox 9">
+            <a:extLst>
+              <a:ext uri="{FF2B5EF4-FFF2-40B4-BE49-F238E27FC236}">
+                <a16:creationId xmlns:a16="http://schemas.microsoft.com/office/drawing/2014/main" id="{14B8E359-C922-B041-2DCF-E06A091D9950}"/>
+              </a:ext>
+            </a:extLst>
+          </p:cNvPr>
+          <p:cNvSpPr txBox="1"/>
+          <p:nvPr/>
+        </p:nvSpPr>
+        <p:spPr>
+          <a:xfrm>
+            <a:off x="6158484" y="1297770"/>
+            <a:ext cx="2848356" cy="1015663"/>
+          </a:xfrm>
+          <a:prstGeom prst="rect">
+            <a:avLst/>
+          </a:prstGeom>
+          <a:noFill/>
+        </p:spPr>
+        <p:txBody>
+          <a:bodyPr wrap="square">
+            <a:spAutoFit/>
+          </a:bodyPr>
+          <a:lstStyle/>
+          <a:p>
+            <a:r>
+              <a:rPr lang="en-US" sz="2000" b="1" dirty="0">
+                <a:solidFill>
+                  <a:schemeClr val="accent6">
+                    <a:lumMod val="60000"/>
+                    <a:lumOff val="40000"/>
+                  </a:schemeClr>
+                </a:solidFill>
+              </a:rPr>
+              <a:t>3. Embeddings</a:t>
+            </a:r>
+          </a:p>
+          <a:p>
+            <a:r>
+              <a:rPr lang="en-US" sz="2000" dirty="0">
+                <a:solidFill>
+                  <a:schemeClr val="accent6">
+                    <a:lumMod val="60000"/>
+                    <a:lumOff val="40000"/>
+                  </a:schemeClr>
+                </a:solidFill>
+              </a:rPr>
+              <a:t>Convert text into vectors using models</a:t>
+            </a:r>
+          </a:p>
+        </p:txBody>
+      </p:sp>
+      <p:sp>
+        <p:nvSpPr>
+          <p:cNvPr id="12" name="TextBox 11">
+            <a:extLst>
+              <a:ext uri="{FF2B5EF4-FFF2-40B4-BE49-F238E27FC236}">
+                <a16:creationId xmlns:a16="http://schemas.microsoft.com/office/drawing/2014/main" id="{488E3AAF-4EA3-EAE2-3898-1417C899ADBB}"/>
+              </a:ext>
+            </a:extLst>
+          </p:cNvPr>
+          <p:cNvSpPr txBox="1"/>
+          <p:nvPr/>
+        </p:nvSpPr>
+        <p:spPr>
+          <a:xfrm>
+            <a:off x="9075420" y="1246924"/>
+            <a:ext cx="2994660" cy="1323439"/>
+          </a:xfrm>
+          <a:prstGeom prst="rect">
+            <a:avLst/>
+          </a:prstGeom>
+          <a:noFill/>
+        </p:spPr>
+        <p:txBody>
+          <a:bodyPr wrap="square">
+            <a:spAutoFit/>
+          </a:bodyPr>
+          <a:lstStyle/>
+          <a:p>
+            <a:r>
+              <a:rPr lang="en-US" sz="2000" b="1" dirty="0">
+                <a:solidFill>
+                  <a:schemeClr val="accent6">
+                    <a:lumMod val="60000"/>
+                    <a:lumOff val="40000"/>
+                  </a:schemeClr>
+                </a:solidFill>
+              </a:rPr>
+              <a:t>4. Storage</a:t>
+            </a:r>
+          </a:p>
+          <a:p>
+            <a:r>
+              <a:rPr lang="en-US" sz="2000" dirty="0">
+                <a:solidFill>
+                  <a:schemeClr val="accent6">
+                    <a:lumMod val="60000"/>
+                    <a:lumOff val="40000"/>
+                  </a:schemeClr>
+                </a:solidFill>
+              </a:rPr>
+              <a:t>Store vectors in a database called Vector DB</a:t>
+            </a:r>
+            <a:br>
+              <a:rPr lang="en-US" sz="2000" dirty="0">
+                <a:solidFill>
+                  <a:schemeClr val="accent6">
+                    <a:lumMod val="60000"/>
+                    <a:lumOff val="40000"/>
+                  </a:schemeClr>
+                </a:solidFill>
+              </a:rPr>
+            </a:br>
+            <a:r>
+              <a:rPr lang="en-US" sz="2000" dirty="0">
+                <a:solidFill>
+                  <a:schemeClr val="accent6">
+                    <a:lumMod val="60000"/>
+                    <a:lumOff val="40000"/>
+                  </a:schemeClr>
+                </a:solidFill>
+              </a:rPr>
+              <a:t>(e.g., Pinecone, FAISS, etc.)</a:t>
+            </a:r>
+          </a:p>
+        </p:txBody>
+      </p:sp>
+      <p:sp>
+        <p:nvSpPr>
+          <p:cNvPr id="14" name="TextBox 13">
+            <a:extLst>
+              <a:ext uri="{FF2B5EF4-FFF2-40B4-BE49-F238E27FC236}">
+                <a16:creationId xmlns:a16="http://schemas.microsoft.com/office/drawing/2014/main" id="{88872BF6-26E0-F155-74DE-2E7D5AC304EC}"/>
+              </a:ext>
+            </a:extLst>
+          </p:cNvPr>
+          <p:cNvSpPr txBox="1"/>
+          <p:nvPr/>
+        </p:nvSpPr>
+        <p:spPr>
+          <a:xfrm>
+            <a:off x="32004" y="1284839"/>
+            <a:ext cx="2980944" cy="1015663"/>
+          </a:xfrm>
+          <a:prstGeom prst="rect">
+            <a:avLst/>
+          </a:prstGeom>
+          <a:noFill/>
+        </p:spPr>
+        <p:txBody>
+          <a:bodyPr wrap="square">
+            <a:spAutoFit/>
+          </a:bodyPr>
+          <a:lstStyle/>
+          <a:p>
+            <a:r>
+              <a:rPr lang="en-US" sz="2000" b="1" dirty="0">
+                <a:solidFill>
+                  <a:schemeClr val="accent6">
+                    <a:lumMod val="60000"/>
+                    <a:lumOff val="40000"/>
+                  </a:schemeClr>
+                </a:solidFill>
+              </a:rPr>
+              <a:t>1. Data Collection</a:t>
+            </a:r>
+          </a:p>
+          <a:p>
+            <a:r>
+              <a:rPr lang="en-US" sz="2000" dirty="0">
+                <a:solidFill>
+                  <a:schemeClr val="accent6">
+                    <a:lumMod val="60000"/>
+                    <a:lumOff val="40000"/>
+                  </a:schemeClr>
+                </a:solidFill>
+              </a:rPr>
+              <a:t>Collect documents</a:t>
+            </a:r>
+          </a:p>
+          <a:p>
+            <a:r>
+              <a:rPr lang="en-US" sz="2000" dirty="0">
+                <a:solidFill>
+                  <a:schemeClr val="accent6">
+                    <a:lumMod val="60000"/>
+                    <a:lumOff val="40000"/>
+                  </a:schemeClr>
+                </a:solidFill>
+              </a:rPr>
+              <a:t> (PDFs, text, etc.)</a:t>
+            </a:r>
+          </a:p>
+        </p:txBody>
+      </p:sp>
+      <p:pic>
+        <p:nvPicPr>
+          <p:cNvPr id="16" name="Picture 15">
+            <a:extLst>
+              <a:ext uri="{FF2B5EF4-FFF2-40B4-BE49-F238E27FC236}">
+                <a16:creationId xmlns:a16="http://schemas.microsoft.com/office/drawing/2014/main" id="{D066FAF5-B058-6F25-D9BE-0BCFA6CE25C7}"/>
+              </a:ext>
+            </a:extLst>
+          </p:cNvPr>
+          <p:cNvPicPr>
+            <a:picLocks noChangeAspect="1"/>
+          </p:cNvPicPr>
+          <p:nvPr/>
+        </p:nvPicPr>
+        <p:blipFill>
+          <a:blip r:embed="rId2"/>
+          <a:stretch>
+            <a:fillRect/>
+          </a:stretch>
+        </p:blipFill>
+        <p:spPr>
+          <a:xfrm>
+            <a:off x="1205529" y="2518664"/>
+            <a:ext cx="8183351" cy="4291358"/>
+          </a:xfrm>
+          <a:prstGeom prst="rect">
+            <a:avLst/>
+          </a:prstGeom>
+        </p:spPr>
+      </p:pic>
+      <p:grpSp>
+        <p:nvGrpSpPr>
+          <p:cNvPr id="25" name="Group 24">
+            <a:extLst>
+              <a:ext uri="{FF2B5EF4-FFF2-40B4-BE49-F238E27FC236}">
+                <a16:creationId xmlns:a16="http://schemas.microsoft.com/office/drawing/2014/main" id="{81691889-22AB-ED8F-DCBE-7E5556EE83D3}"/>
+              </a:ext>
+            </a:extLst>
+          </p:cNvPr>
+          <p:cNvGrpSpPr/>
+          <p:nvPr/>
+        </p:nvGrpSpPr>
+        <p:grpSpPr>
+          <a:xfrm>
+            <a:off x="1151784" y="4918176"/>
+            <a:ext cx="296640" cy="330120"/>
+            <a:chOff x="1151784" y="4918176"/>
+            <a:chExt cx="296640" cy="330120"/>
+          </a:xfrm>
+        </p:grpSpPr>
+        <mc:AlternateContent xmlns:mc="http://schemas.openxmlformats.org/markup-compatibility/2006" xmlns:p14="http://schemas.microsoft.com/office/powerpoint/2010/main">
+          <mc:Choice Requires="p14">
+            <p:contentPart p14:bwMode="auto" r:id="rId3">
+              <p14:nvContentPartPr>
+                <p14:cNvPr id="17" name="Ink 16">
+                  <a:extLst>
+                    <a:ext uri="{FF2B5EF4-FFF2-40B4-BE49-F238E27FC236}">
+                      <a16:creationId xmlns:a16="http://schemas.microsoft.com/office/drawing/2014/main" id="{34A63221-98D6-7B3F-E096-669B4766EEFB}"/>
+                    </a:ext>
+                  </a:extLst>
+                </p14:cNvPr>
+                <p14:cNvContentPartPr/>
+                <p14:nvPr/>
+              </p14:nvContentPartPr>
+              <p14:xfrm>
+                <a:off x="1313784" y="5012496"/>
+                <a:ext cx="48240" cy="172440"/>
+              </p14:xfrm>
+            </p:contentPart>
+          </mc:Choice>
+          <mc:Fallback xmlns="">
+            <p:pic>
+              <p:nvPicPr>
+                <p:cNvPr id="17" name="Ink 16">
+                  <a:extLst>
+                    <a:ext uri="{FF2B5EF4-FFF2-40B4-BE49-F238E27FC236}">
+                      <a16:creationId xmlns:a16="http://schemas.microsoft.com/office/drawing/2014/main" id="{34A63221-98D6-7B3F-E096-669B4766EEFB}"/>
+                    </a:ext>
+                  </a:extLst>
+                </p:cNvPr>
+                <p:cNvPicPr/>
+                <p:nvPr/>
+              </p:nvPicPr>
+              <p:blipFill>
+                <a:blip r:embed="rId4"/>
+                <a:stretch>
+                  <a:fillRect/>
+                </a:stretch>
+              </p:blipFill>
+              <p:spPr>
+                <a:xfrm>
+                  <a:off x="1278051" y="4976571"/>
+                  <a:ext cx="119349" cy="243931"/>
+                </a:xfrm>
+                <a:prstGeom prst="rect">
+                  <a:avLst/>
+                </a:prstGeom>
+              </p:spPr>
+            </p:pic>
+          </mc:Fallback>
+        </mc:AlternateContent>
+        <mc:AlternateContent xmlns:mc="http://schemas.openxmlformats.org/markup-compatibility/2006" xmlns:p14="http://schemas.microsoft.com/office/powerpoint/2010/main">
+          <mc:Choice Requires="p14">
+            <p:contentPart p14:bwMode="auto" r:id="rId5">
+              <p14:nvContentPartPr>
+                <p14:cNvPr id="18" name="Ink 17">
+                  <a:extLst>
+                    <a:ext uri="{FF2B5EF4-FFF2-40B4-BE49-F238E27FC236}">
+                      <a16:creationId xmlns:a16="http://schemas.microsoft.com/office/drawing/2014/main" id="{FBD5B242-F351-27FE-1CE0-89729C05CEEB}"/>
+                    </a:ext>
+                  </a:extLst>
+                </p14:cNvPr>
+                <p14:cNvContentPartPr/>
+                <p14:nvPr/>
+              </p14:nvContentPartPr>
+              <p14:xfrm>
+                <a:off x="1151784" y="4918176"/>
+                <a:ext cx="296640" cy="330120"/>
+              </p14:xfrm>
+            </p:contentPart>
+          </mc:Choice>
+          <mc:Fallback xmlns="">
+            <p:pic>
+              <p:nvPicPr>
+                <p:cNvPr id="18" name="Ink 17">
+                  <a:extLst>
+                    <a:ext uri="{FF2B5EF4-FFF2-40B4-BE49-F238E27FC236}">
+                      <a16:creationId xmlns:a16="http://schemas.microsoft.com/office/drawing/2014/main" id="{FBD5B242-F351-27FE-1CE0-89729C05CEEB}"/>
+                    </a:ext>
+                  </a:extLst>
+                </p:cNvPr>
+                <p:cNvPicPr/>
+                <p:nvPr/>
+              </p:nvPicPr>
+              <p:blipFill>
+                <a:blip r:embed="rId6"/>
+                <a:stretch>
+                  <a:fillRect/>
+                </a:stretch>
+              </p:blipFill>
+              <p:spPr>
+                <a:xfrm>
+                  <a:off x="1115784" y="4882176"/>
+                  <a:ext cx="368280" cy="401760"/>
+                </a:xfrm>
+                <a:prstGeom prst="rect">
+                  <a:avLst/>
+                </a:prstGeom>
+              </p:spPr>
+            </p:pic>
+          </mc:Fallback>
+        </mc:AlternateContent>
+      </p:grpSp>
+      <p:grpSp>
+        <p:nvGrpSpPr>
+          <p:cNvPr id="24" name="Group 23">
+            <a:extLst>
+              <a:ext uri="{FF2B5EF4-FFF2-40B4-BE49-F238E27FC236}">
+                <a16:creationId xmlns:a16="http://schemas.microsoft.com/office/drawing/2014/main" id="{B6AFE0D5-7431-D99D-3F25-E60889713D3D}"/>
+              </a:ext>
+            </a:extLst>
+          </p:cNvPr>
+          <p:cNvGrpSpPr/>
+          <p:nvPr/>
+        </p:nvGrpSpPr>
+        <p:grpSpPr>
+          <a:xfrm>
+            <a:off x="2446344" y="4818096"/>
+            <a:ext cx="284760" cy="228240"/>
+            <a:chOff x="2446344" y="4818096"/>
+            <a:chExt cx="284760" cy="228240"/>
+          </a:xfrm>
+        </p:grpSpPr>
+        <mc:AlternateContent xmlns:mc="http://schemas.openxmlformats.org/markup-compatibility/2006" xmlns:p14="http://schemas.microsoft.com/office/powerpoint/2010/main">
+          <mc:Choice Requires="p14">
+            <p:contentPart p14:bwMode="auto" r:id="rId7">
+              <p14:nvContentPartPr>
+                <p14:cNvPr id="19" name="Ink 18">
+                  <a:extLst>
+                    <a:ext uri="{FF2B5EF4-FFF2-40B4-BE49-F238E27FC236}">
+                      <a16:creationId xmlns:a16="http://schemas.microsoft.com/office/drawing/2014/main" id="{3C97284A-9824-9EE2-C83A-B38793160D45}"/>
+                    </a:ext>
+                  </a:extLst>
+                </p14:cNvPr>
+                <p14:cNvContentPartPr/>
+                <p14:nvPr/>
+              </p14:nvContentPartPr>
+              <p14:xfrm>
+                <a:off x="2544984" y="4888656"/>
+                <a:ext cx="153720" cy="104760"/>
+              </p14:xfrm>
+            </p:contentPart>
+          </mc:Choice>
+          <mc:Fallback xmlns="">
+            <p:pic>
+              <p:nvPicPr>
+                <p:cNvPr id="19" name="Ink 18">
+                  <a:extLst>
+                    <a:ext uri="{FF2B5EF4-FFF2-40B4-BE49-F238E27FC236}">
+                      <a16:creationId xmlns:a16="http://schemas.microsoft.com/office/drawing/2014/main" id="{3C97284A-9824-9EE2-C83A-B38793160D45}"/>
+                    </a:ext>
+                  </a:extLst>
+                </p:cNvPr>
+                <p:cNvPicPr/>
+                <p:nvPr/>
+              </p:nvPicPr>
+              <p:blipFill>
+                <a:blip r:embed="rId8"/>
+                <a:stretch>
+                  <a:fillRect/>
+                </a:stretch>
+              </p:blipFill>
+              <p:spPr>
+                <a:xfrm>
+                  <a:off x="2508984" y="4852656"/>
+                  <a:ext cx="225360" cy="176400"/>
+                </a:xfrm>
+                <a:prstGeom prst="rect">
+                  <a:avLst/>
+                </a:prstGeom>
+              </p:spPr>
+            </p:pic>
+          </mc:Fallback>
+        </mc:AlternateContent>
+        <mc:AlternateContent xmlns:mc="http://schemas.openxmlformats.org/markup-compatibility/2006" xmlns:p14="http://schemas.microsoft.com/office/powerpoint/2010/main">
+          <mc:Choice Requires="p14">
+            <p:contentPart p14:bwMode="auto" r:id="rId9">
+              <p14:nvContentPartPr>
+                <p14:cNvPr id="20" name="Ink 19">
+                  <a:extLst>
+                    <a:ext uri="{FF2B5EF4-FFF2-40B4-BE49-F238E27FC236}">
+                      <a16:creationId xmlns:a16="http://schemas.microsoft.com/office/drawing/2014/main" id="{8FF66879-5046-ABB0-AEC2-63A88D7261C1}"/>
+                    </a:ext>
+                  </a:extLst>
+                </p14:cNvPr>
+                <p14:cNvContentPartPr/>
+                <p14:nvPr/>
+              </p14:nvContentPartPr>
+              <p14:xfrm>
+                <a:off x="2446344" y="4818096"/>
+                <a:ext cx="284760" cy="228240"/>
+              </p14:xfrm>
+            </p:contentPart>
+          </mc:Choice>
+          <mc:Fallback xmlns="">
+            <p:pic>
+              <p:nvPicPr>
+                <p:cNvPr id="20" name="Ink 19">
+                  <a:extLst>
+                    <a:ext uri="{FF2B5EF4-FFF2-40B4-BE49-F238E27FC236}">
+                      <a16:creationId xmlns:a16="http://schemas.microsoft.com/office/drawing/2014/main" id="{8FF66879-5046-ABB0-AEC2-63A88D7261C1}"/>
+                    </a:ext>
+                  </a:extLst>
+                </p:cNvPr>
+                <p:cNvPicPr/>
+                <p:nvPr/>
+              </p:nvPicPr>
+              <p:blipFill>
+                <a:blip r:embed="rId10"/>
+                <a:stretch>
+                  <a:fillRect/>
+                </a:stretch>
+              </p:blipFill>
+              <p:spPr>
+                <a:xfrm>
+                  <a:off x="2410344" y="4782096"/>
+                  <a:ext cx="356400" cy="299880"/>
+                </a:xfrm>
+                <a:prstGeom prst="rect">
+                  <a:avLst/>
+                </a:prstGeom>
+              </p:spPr>
+            </p:pic>
+          </mc:Fallback>
+        </mc:AlternateContent>
+      </p:grpSp>
+      <p:grpSp>
+        <p:nvGrpSpPr>
+          <p:cNvPr id="23" name="Group 22">
+            <a:extLst>
+              <a:ext uri="{FF2B5EF4-FFF2-40B4-BE49-F238E27FC236}">
+                <a16:creationId xmlns:a16="http://schemas.microsoft.com/office/drawing/2014/main" id="{BB113754-F093-1A54-E8AE-4750C97A2846}"/>
+              </a:ext>
+            </a:extLst>
+          </p:cNvPr>
+          <p:cNvGrpSpPr/>
+          <p:nvPr/>
+        </p:nvGrpSpPr>
+        <p:grpSpPr>
+          <a:xfrm>
+            <a:off x="3546144" y="4783536"/>
+            <a:ext cx="371520" cy="278640"/>
+            <a:chOff x="3546144" y="4783536"/>
+            <a:chExt cx="371520" cy="278640"/>
+          </a:xfrm>
+        </p:grpSpPr>
+        <mc:AlternateContent xmlns:mc="http://schemas.openxmlformats.org/markup-compatibility/2006" xmlns:p14="http://schemas.microsoft.com/office/powerpoint/2010/main">
+          <mc:Choice Requires="p14">
+            <p:contentPart p14:bwMode="auto" r:id="rId11">
+              <p14:nvContentPartPr>
+                <p14:cNvPr id="21" name="Ink 20">
+                  <a:extLst>
+                    <a:ext uri="{FF2B5EF4-FFF2-40B4-BE49-F238E27FC236}">
+                      <a16:creationId xmlns:a16="http://schemas.microsoft.com/office/drawing/2014/main" id="{B420A0EC-D58F-C2C8-8BDF-1F7D83FB936F}"/>
+                    </a:ext>
+                  </a:extLst>
+                </p14:cNvPr>
+                <p14:cNvContentPartPr/>
+                <p14:nvPr/>
+              </p14:nvContentPartPr>
+              <p14:xfrm>
+                <a:off x="3672144" y="4865256"/>
+                <a:ext cx="166320" cy="131040"/>
+              </p14:xfrm>
+            </p:contentPart>
+          </mc:Choice>
+          <mc:Fallback xmlns="">
+            <p:pic>
+              <p:nvPicPr>
+                <p:cNvPr id="21" name="Ink 20">
+                  <a:extLst>
+                    <a:ext uri="{FF2B5EF4-FFF2-40B4-BE49-F238E27FC236}">
+                      <a16:creationId xmlns:a16="http://schemas.microsoft.com/office/drawing/2014/main" id="{B420A0EC-D58F-C2C8-8BDF-1F7D83FB936F}"/>
+                    </a:ext>
+                  </a:extLst>
+                </p:cNvPr>
+                <p:cNvPicPr/>
+                <p:nvPr/>
+              </p:nvPicPr>
+              <p:blipFill>
+                <a:blip r:embed="rId12"/>
+                <a:stretch>
+                  <a:fillRect/>
+                </a:stretch>
+              </p:blipFill>
+              <p:spPr>
+                <a:xfrm>
+                  <a:off x="3636144" y="4829256"/>
+                  <a:ext cx="237960" cy="202680"/>
+                </a:xfrm>
+                <a:prstGeom prst="rect">
+                  <a:avLst/>
+                </a:prstGeom>
+              </p:spPr>
+            </p:pic>
+          </mc:Fallback>
+        </mc:AlternateContent>
+        <mc:AlternateContent xmlns:mc="http://schemas.openxmlformats.org/markup-compatibility/2006" xmlns:p14="http://schemas.microsoft.com/office/powerpoint/2010/main">
+          <mc:Choice Requires="p14">
+            <p:contentPart p14:bwMode="auto" r:id="rId13">
+              <p14:nvContentPartPr>
+                <p14:cNvPr id="22" name="Ink 21">
+                  <a:extLst>
+                    <a:ext uri="{FF2B5EF4-FFF2-40B4-BE49-F238E27FC236}">
+                      <a16:creationId xmlns:a16="http://schemas.microsoft.com/office/drawing/2014/main" id="{25EA78E1-E035-003B-549B-85801DDD0A28}"/>
+                    </a:ext>
+                  </a:extLst>
+                </p14:cNvPr>
+                <p14:cNvContentPartPr/>
+                <p14:nvPr/>
+              </p14:nvContentPartPr>
+              <p14:xfrm>
+                <a:off x="3546144" y="4783536"/>
+                <a:ext cx="371520" cy="278640"/>
+              </p14:xfrm>
+            </p:contentPart>
+          </mc:Choice>
+          <mc:Fallback xmlns="">
+            <p:pic>
+              <p:nvPicPr>
+                <p:cNvPr id="22" name="Ink 21">
+                  <a:extLst>
+                    <a:ext uri="{FF2B5EF4-FFF2-40B4-BE49-F238E27FC236}">
+                      <a16:creationId xmlns:a16="http://schemas.microsoft.com/office/drawing/2014/main" id="{25EA78E1-E035-003B-549B-85801DDD0A28}"/>
+                    </a:ext>
+                  </a:extLst>
+                </p:cNvPr>
+                <p:cNvPicPr/>
+                <p:nvPr/>
+              </p:nvPicPr>
+              <p:blipFill>
+                <a:blip r:embed="rId14"/>
+                <a:stretch>
+                  <a:fillRect/>
+                </a:stretch>
+              </p:blipFill>
+              <p:spPr>
+                <a:xfrm>
+                  <a:off x="3510109" y="4747489"/>
+                  <a:ext cx="443229" cy="350373"/>
+                </a:xfrm>
+                <a:prstGeom prst="rect">
+                  <a:avLst/>
+                </a:prstGeom>
+              </p:spPr>
+            </p:pic>
+          </mc:Fallback>
+        </mc:AlternateContent>
+      </p:grpSp>
+      <p:grpSp>
+        <p:nvGrpSpPr>
+          <p:cNvPr id="28" name="Group 27">
+            <a:extLst>
+              <a:ext uri="{FF2B5EF4-FFF2-40B4-BE49-F238E27FC236}">
+                <a16:creationId xmlns:a16="http://schemas.microsoft.com/office/drawing/2014/main" id="{26238F50-C49D-1CC3-C896-301C09061960}"/>
+              </a:ext>
+            </a:extLst>
+          </p:cNvPr>
+          <p:cNvGrpSpPr/>
+          <p:nvPr/>
+        </p:nvGrpSpPr>
+        <p:grpSpPr>
+          <a:xfrm>
+            <a:off x="4928904" y="5097456"/>
+            <a:ext cx="330120" cy="320400"/>
+            <a:chOff x="4928904" y="5097456"/>
+            <a:chExt cx="330120" cy="320400"/>
+          </a:xfrm>
+        </p:grpSpPr>
+        <mc:AlternateContent xmlns:mc="http://schemas.openxmlformats.org/markup-compatibility/2006" xmlns:p14="http://schemas.microsoft.com/office/powerpoint/2010/main">
+          <mc:Choice Requires="p14">
+            <p:contentPart p14:bwMode="auto" r:id="rId15">
+              <p14:nvContentPartPr>
+                <p14:cNvPr id="26" name="Ink 25">
+                  <a:extLst>
+                    <a:ext uri="{FF2B5EF4-FFF2-40B4-BE49-F238E27FC236}">
+                      <a16:creationId xmlns:a16="http://schemas.microsoft.com/office/drawing/2014/main" id="{18A832EC-49DD-E286-D542-A50EAA079166}"/>
+                    </a:ext>
+                  </a:extLst>
+                </p14:cNvPr>
+                <p14:cNvContentPartPr/>
+                <p14:nvPr/>
+              </p14:nvContentPartPr>
+              <p14:xfrm>
+                <a:off x="5025024" y="5169816"/>
+                <a:ext cx="97920" cy="189360"/>
+              </p14:xfrm>
+            </p:contentPart>
+          </mc:Choice>
+          <mc:Fallback xmlns="">
+            <p:pic>
+              <p:nvPicPr>
+                <p:cNvPr id="26" name="Ink 25">
+                  <a:extLst>
+                    <a:ext uri="{FF2B5EF4-FFF2-40B4-BE49-F238E27FC236}">
+                      <a16:creationId xmlns:a16="http://schemas.microsoft.com/office/drawing/2014/main" id="{18A832EC-49DD-E286-D542-A50EAA079166}"/>
+                    </a:ext>
+                  </a:extLst>
+                </p:cNvPr>
+                <p:cNvPicPr/>
+                <p:nvPr/>
+              </p:nvPicPr>
+              <p:blipFill>
+                <a:blip r:embed="rId16"/>
+                <a:stretch>
+                  <a:fillRect/>
+                </a:stretch>
+              </p:blipFill>
+              <p:spPr>
+                <a:xfrm>
+                  <a:off x="4989024" y="5133747"/>
+                  <a:ext cx="169560" cy="261136"/>
+                </a:xfrm>
+                <a:prstGeom prst="rect">
+                  <a:avLst/>
+                </a:prstGeom>
+              </p:spPr>
+            </p:pic>
+          </mc:Fallback>
+        </mc:AlternateContent>
+        <mc:AlternateContent xmlns:mc="http://schemas.openxmlformats.org/markup-compatibility/2006" xmlns:p14="http://schemas.microsoft.com/office/powerpoint/2010/main">
+          <mc:Choice Requires="p14">
+            <p:contentPart p14:bwMode="auto" r:id="rId17">
+              <p14:nvContentPartPr>
+                <p14:cNvPr id="27" name="Ink 26">
+                  <a:extLst>
+                    <a:ext uri="{FF2B5EF4-FFF2-40B4-BE49-F238E27FC236}">
+                      <a16:creationId xmlns:a16="http://schemas.microsoft.com/office/drawing/2014/main" id="{403BC820-7D67-565B-28B6-282CA0EAC828}"/>
+                    </a:ext>
+                  </a:extLst>
+                </p14:cNvPr>
+                <p14:cNvContentPartPr/>
+                <p14:nvPr/>
+              </p14:nvContentPartPr>
+              <p14:xfrm>
+                <a:off x="4928904" y="5097456"/>
+                <a:ext cx="330120" cy="320400"/>
+              </p14:xfrm>
+            </p:contentPart>
+          </mc:Choice>
+          <mc:Fallback xmlns="">
+            <p:pic>
+              <p:nvPicPr>
+                <p:cNvPr id="27" name="Ink 26">
+                  <a:extLst>
+                    <a:ext uri="{FF2B5EF4-FFF2-40B4-BE49-F238E27FC236}">
+                      <a16:creationId xmlns:a16="http://schemas.microsoft.com/office/drawing/2014/main" id="{403BC820-7D67-565B-28B6-282CA0EAC828}"/>
+                    </a:ext>
+                  </a:extLst>
+                </p:cNvPr>
+                <p:cNvPicPr/>
+                <p:nvPr/>
+              </p:nvPicPr>
+              <p:blipFill>
+                <a:blip r:embed="rId18"/>
+                <a:stretch>
+                  <a:fillRect/>
+                </a:stretch>
+              </p:blipFill>
+              <p:spPr>
+                <a:xfrm>
+                  <a:off x="4892904" y="5061456"/>
+                  <a:ext cx="401760" cy="392040"/>
+                </a:xfrm>
+                <a:prstGeom prst="rect">
+                  <a:avLst/>
+                </a:prstGeom>
+              </p:spPr>
+            </p:pic>
+          </mc:Fallback>
+        </mc:AlternateContent>
+      </p:grpSp>
+    </p:spTree>
+    <p:extLst>
+      <p:ext uri="{BB962C8B-B14F-4D97-AF65-F5344CB8AC3E}">
+        <p14:creationId xmlns:p14="http://schemas.microsoft.com/office/powerpoint/2010/main" val="3721953785"/>
+      </p:ext>
+    </p:extLst>
+  </p:cSld>
+  <p:clrMapOvr>
+    <a:masterClrMapping/>
+  </p:clrMapOvr>
+</p:sld>
+</file>
+
+<file path=ppt/slides/slide11.xml><?xml version="1.0" encoding="utf-8"?>
+<p:sld xmlns:a="http://schemas.openxmlformats.org/drawingml/2006/main" xmlns:r="http://schemas.openxmlformats.org/officeDocument/2006/relationships" xmlns:p="http://schemas.openxmlformats.org/presentationml/2006/main">
+  <p:cSld>
+    <p:spTree>
+      <p:nvGrpSpPr>
+        <p:cNvPr id="1" name="">
+          <a:extLst>
+            <a:ext uri="{FF2B5EF4-FFF2-40B4-BE49-F238E27FC236}">
               <a16:creationId xmlns:a16="http://schemas.microsoft.com/office/drawing/2014/main" id="{3468BF28-BE79-4111-F78E-7C4878E97A10}"/>
             </a:ext>
           </a:extLst>
@@ -13323,7 +14191,7 @@
 </p:sld>
 </file>
 
-<file path=ppt/slides/slide11.xml><?xml version="1.0" encoding="utf-8"?>
+<file path=ppt/slides/slide12.xml><?xml version="1.0" encoding="utf-8"?>
 <p:sld xmlns:a="http://schemas.openxmlformats.org/drawingml/2006/main" xmlns:r="http://schemas.openxmlformats.org/officeDocument/2006/relationships" xmlns:p="http://schemas.openxmlformats.org/presentationml/2006/main">
   <p:cSld>
     <p:spTree>
@@ -14232,7 +15100,7 @@
 </p:sld>
 </file>
 
-<file path=ppt/slides/slide12.xml><?xml version="1.0" encoding="utf-8"?>
+<file path=ppt/slides/slide13.xml><?xml version="1.0" encoding="utf-8"?>
 <p:sld xmlns:a="http://schemas.openxmlformats.org/drawingml/2006/main" xmlns:r="http://schemas.openxmlformats.org/officeDocument/2006/relationships" xmlns:p="http://schemas.openxmlformats.org/presentationml/2006/main">
   <p:cSld>
     <p:spTree>
@@ -14372,7 +15240,17 @@
                 <a:effectLst/>
                 <a:latin typeface="Consolas" panose="020B0609020204030204" pitchFamily="49" charset="0"/>
               </a:rPr>
-              <a:t>    Answer ONLY from the context.</a:t>
+              <a:t>    Answer ONLY from the context. Do NOT make </a:t>
+            </a:r>
+            <a:r>
+              <a:rPr lang="en-US" sz="2400" b="0">
+                <a:solidFill>
+                  <a:srgbClr val="CE9178"/>
+                </a:solidFill>
+                <a:effectLst/>
+                <a:latin typeface="Consolas" panose="020B0609020204030204" pitchFamily="49" charset="0"/>
+              </a:rPr>
+              <a:t>up answers.</a:t>
             </a:r>
             <a:endParaRPr lang="en-US" sz="2400" b="0" dirty="0">
               <a:solidFill>
@@ -14635,8 +15513,8 @@
         </p:nvSpPr>
         <p:spPr>
           <a:xfrm>
-            <a:off x="230632" y="244824"/>
-            <a:ext cx="3747008" cy="461665"/>
+            <a:off x="250296" y="254656"/>
+            <a:ext cx="3747008" cy="830997"/>
           </a:xfrm>
           <a:prstGeom prst="rect">
             <a:avLst/>
@@ -14658,7 +15536,20 @@
                   </a:schemeClr>
                 </a:solidFill>
               </a:rPr>
-              <a:t>Phase B ( User Query )</a:t>
+              <a:t>Phase B ( User Query ):</a:t>
+            </a:r>
+          </a:p>
+          <a:p>
+            <a:r>
+              <a:rPr lang="en-US" sz="2400" b="1" dirty="0">
+                <a:solidFill>
+                  <a:schemeClr val="accent6">
+                    <a:lumMod val="60000"/>
+                    <a:lumOff val="40000"/>
+                  </a:schemeClr>
+                </a:solidFill>
+              </a:rPr>
+              <a:t>2. Generation</a:t>
             </a:r>
           </a:p>
         </p:txBody>
@@ -16203,7 +17094,7 @@
               <a:t>LLM responds:  </a:t>
             </a:r>
             <a:r>
-              <a:rPr lang="en-US" sz="2400" b="1" dirty="0">
+              <a:rPr lang="en-US" sz="2400" b="1" i="1" dirty="0">
                 <a:solidFill>
                   <a:schemeClr val="accent6">
                     <a:lumMod val="60000"/>
@@ -16229,7 +17120,7 @@
 </p:sld>
 </file>
 
-<file path=ppt/slides/slide13.xml><?xml version="1.0" encoding="utf-8"?>
+<file path=ppt/slides/slide14.xml><?xml version="1.0" encoding="utf-8"?>
 <p:sld xmlns:a="http://schemas.openxmlformats.org/drawingml/2006/main" xmlns:r="http://schemas.openxmlformats.org/officeDocument/2006/relationships" xmlns:p="http://schemas.openxmlformats.org/presentationml/2006/main">
   <p:cSld>
     <p:spTree>
@@ -16289,7 +17180,7 @@
                   </a:schemeClr>
                 </a:solidFill>
               </a:rPr>
-              <a:t>🔹 Key Benefits</a:t>
+              <a:t>🔹 Key Benefits of RAG – Why it is popular ?</a:t>
             </a:r>
           </a:p>
           <a:p>
@@ -16323,7 +17214,18 @@
                   </a:schemeClr>
                 </a:solidFill>
               </a:rPr>
-              <a:t>✔ Keeps answers updated</a:t>
+              <a:t>✔ Keeps answers </a:t>
+            </a:r>
+            <a:r>
+              <a:rPr lang="en-US" sz="2400" b="1" i="1" dirty="0">
+                <a:solidFill>
+                  <a:schemeClr val="accent6">
+                    <a:lumMod val="60000"/>
+                    <a:lumOff val="40000"/>
+                  </a:schemeClr>
+                </a:solidFill>
+              </a:rPr>
+              <a:t>updated</a:t>
             </a:r>
             <a:br>
               <a:rPr lang="en-US" sz="2400" dirty="0">
@@ -16344,7 +17246,18 @@
                   </a:schemeClr>
                 </a:solidFill>
               </a:rPr>
-              <a:t>✔ Works with private data</a:t>
+              <a:t>✔ Works with </a:t>
+            </a:r>
+            <a:r>
+              <a:rPr lang="en-US" sz="2400" b="1" i="1" dirty="0">
+                <a:solidFill>
+                  <a:schemeClr val="accent6">
+                    <a:lumMod val="60000"/>
+                    <a:lumOff val="40000"/>
+                  </a:schemeClr>
+                </a:solidFill>
+              </a:rPr>
+              <a:t>private data</a:t>
             </a:r>
           </a:p>
         </p:txBody>
@@ -16379,6 +17292,48 @@
           </a:prstGeom>
         </p:spPr>
       </p:pic>
+      <p:sp>
+        <p:nvSpPr>
+          <p:cNvPr id="2" name="TextBox 1">
+            <a:extLst>
+              <a:ext uri="{FF2B5EF4-FFF2-40B4-BE49-F238E27FC236}">
+                <a16:creationId xmlns:a16="http://schemas.microsoft.com/office/drawing/2014/main" id="{A85208BE-A4BC-AAC0-0F38-8C3BB741F52D}"/>
+              </a:ext>
+            </a:extLst>
+          </p:cNvPr>
+          <p:cNvSpPr txBox="1"/>
+          <p:nvPr/>
+        </p:nvSpPr>
+        <p:spPr>
+          <a:xfrm>
+            <a:off x="9645445" y="4178710"/>
+            <a:ext cx="1897626" cy="1477328"/>
+          </a:xfrm>
+          <a:prstGeom prst="rect">
+            <a:avLst/>
+          </a:prstGeom>
+          <a:noFill/>
+        </p:spPr>
+        <p:txBody>
+          <a:bodyPr wrap="square" rtlCol="0">
+            <a:spAutoFit/>
+          </a:bodyPr>
+          <a:lstStyle/>
+          <a:p>
+            <a:r>
+              <a:rPr lang="en-IN" dirty="0">
+                <a:solidFill>
+                  <a:schemeClr val="accent6">
+                    <a:lumMod val="60000"/>
+                    <a:lumOff val="40000"/>
+                  </a:schemeClr>
+                </a:solidFill>
+              </a:rPr>
+              <a:t>If a new data about company comes in, just update the vector DB </a:t>
+            </a:r>
+          </a:p>
+        </p:txBody>
+      </p:sp>
     </p:spTree>
     <p:extLst>
       <p:ext uri="{BB962C8B-B14F-4D97-AF65-F5344CB8AC3E}">
@@ -16392,7 +17347,7 @@
 </p:sld>
 </file>
 
-<file path=ppt/slides/slide14.xml><?xml version="1.0" encoding="utf-8"?>
+<file path=ppt/slides/slide15.xml><?xml version="1.0" encoding="utf-8"?>
 <p:sld xmlns:a="http://schemas.openxmlformats.org/drawingml/2006/main" xmlns:r="http://schemas.openxmlformats.org/officeDocument/2006/relationships" xmlns:p="http://schemas.openxmlformats.org/presentationml/2006/main">
   <p:cSld>
     <p:spTree>
@@ -16469,8 +17424,27 @@
                   </a:schemeClr>
                 </a:solidFill>
               </a:rPr>
-              <a:t>Chatbots for companies</a:t>
+              <a:t>Chatbots for companies – Amazon</a:t>
             </a:r>
+            <a:r>
+              <a:rPr lang="en-US" sz="2400">
+                <a:solidFill>
+                  <a:schemeClr val="accent6">
+                    <a:lumMod val="60000"/>
+                    <a:lumOff val="40000"/>
+                  </a:schemeClr>
+                </a:solidFill>
+              </a:rPr>
+              <a:t>, etc.</a:t>
+            </a:r>
+            <a:endParaRPr lang="en-US" sz="2400" dirty="0">
+              <a:solidFill>
+                <a:schemeClr val="accent6">
+                  <a:lumMod val="60000"/>
+                  <a:lumOff val="40000"/>
+                </a:schemeClr>
+              </a:solidFill>
+            </a:endParaRPr>
           </a:p>
           <a:p>
             <a:pPr marL="342900" indent="-342900">
@@ -16585,7 +17559,7 @@
 </p:sld>
 </file>
 
-<file path=ppt/slides/slide15.xml><?xml version="1.0" encoding="utf-8"?>
+<file path=ppt/slides/slide16.xml><?xml version="1.0" encoding="utf-8"?>
 <p:sld xmlns:a="http://schemas.openxmlformats.org/drawingml/2006/main" xmlns:r="http://schemas.openxmlformats.org/officeDocument/2006/relationships" xmlns:p="http://schemas.openxmlformats.org/presentationml/2006/main">
   <p:cSld>
     <p:spTree>
@@ -16610,41 +17584,6 @@
       </p:grpSpPr>
       <p:sp>
         <p:nvSpPr>
-          <p:cNvPr id="2" name="Title 1">
-            <a:extLst>
-              <a:ext uri="{FF2B5EF4-FFF2-40B4-BE49-F238E27FC236}">
-                <a16:creationId xmlns:a16="http://schemas.microsoft.com/office/drawing/2014/main" id="{795E1B75-886E-0812-B2FD-DD250C225521}"/>
-              </a:ext>
-            </a:extLst>
-          </p:cNvPr>
-          <p:cNvSpPr>
-            <a:spLocks noGrp="1"/>
-          </p:cNvSpPr>
-          <p:nvPr>
-            <p:ph type="title"/>
-          </p:nvPr>
-        </p:nvSpPr>
-        <p:spPr>
-          <a:xfrm>
-            <a:off x="274320" y="136525"/>
-            <a:ext cx="11466576" cy="832739"/>
-          </a:xfrm>
-        </p:spPr>
-        <p:txBody>
-          <a:bodyPr>
-            <a:normAutofit/>
-          </a:bodyPr>
-          <a:lstStyle/>
-          <a:p>
-            <a:r>
-              <a:rPr lang="en-US" sz="3600" dirty="0"/>
-              <a:t>EXTRA</a:t>
-            </a:r>
-          </a:p>
-        </p:txBody>
-      </p:sp>
-      <p:sp>
-        <p:nvSpPr>
           <p:cNvPr id="4" name="TextBox 3">
             <a:extLst>
               <a:ext uri="{FF2B5EF4-FFF2-40B4-BE49-F238E27FC236}">
@@ -16657,8 +17596,8 @@
         </p:nvSpPr>
         <p:spPr>
           <a:xfrm>
-            <a:off x="274320" y="933117"/>
-            <a:ext cx="11658600" cy="369332"/>
+            <a:off x="3510115" y="254691"/>
+            <a:ext cx="4293255" cy="769441"/>
           </a:xfrm>
           <a:prstGeom prst="rect">
             <a:avLst/>
@@ -16671,11 +17610,11 @@
           </a:bodyPr>
           <a:lstStyle/>
           <a:p>
-            <a:pPr marL="0" indent="0">
+            <a:pPr marL="0" indent="0" algn="ctr">
               <a:buNone/>
             </a:pPr>
             <a:r>
-              <a:rPr lang="en-US" dirty="0" err="1">
+              <a:rPr lang="en-US" sz="4400" b="1" dirty="0">
                 <a:solidFill>
                   <a:schemeClr val="accent6">
                     <a:lumMod val="60000"/>
@@ -16683,9 +17622,222 @@
                   </a:schemeClr>
                 </a:solidFill>
               </a:rPr>
-              <a:t>xxxxxxxxxxxxxx</a:t>
+              <a:t>Q and A</a:t>
             </a:r>
-            <a:endParaRPr lang="en-US" dirty="0">
+          </a:p>
+        </p:txBody>
+      </p:sp>
+      <p:sp>
+        <p:nvSpPr>
+          <p:cNvPr id="7" name="TextBox 6">
+            <a:extLst>
+              <a:ext uri="{FF2B5EF4-FFF2-40B4-BE49-F238E27FC236}">
+                <a16:creationId xmlns:a16="http://schemas.microsoft.com/office/drawing/2014/main" id="{EF04AC8A-2060-0030-B70F-A54AD807AE60}"/>
+              </a:ext>
+            </a:extLst>
+          </p:cNvPr>
+          <p:cNvSpPr txBox="1"/>
+          <p:nvPr/>
+        </p:nvSpPr>
+        <p:spPr>
+          <a:xfrm>
+            <a:off x="91931" y="1282162"/>
+            <a:ext cx="9012740" cy="4524315"/>
+          </a:xfrm>
+          <a:prstGeom prst="rect">
+            <a:avLst/>
+          </a:prstGeom>
+          <a:noFill/>
+        </p:spPr>
+        <p:txBody>
+          <a:bodyPr wrap="square">
+            <a:spAutoFit/>
+          </a:bodyPr>
+          <a:lstStyle/>
+          <a:p>
+            <a:pPr marL="457200" indent="-457200">
+              <a:buAutoNum type="arabicParenR"/>
+            </a:pPr>
+            <a:r>
+              <a:rPr lang="en-US" sz="2400" dirty="0">
+                <a:solidFill>
+                  <a:schemeClr val="accent6">
+                    <a:lumMod val="60000"/>
+                    <a:lumOff val="40000"/>
+                  </a:schemeClr>
+                </a:solidFill>
+              </a:rPr>
+              <a:t>Can chat GPT answer questions about your resume  ?</a:t>
+            </a:r>
+          </a:p>
+          <a:p>
+            <a:pPr marL="457200" indent="-457200">
+              <a:buAutoNum type="arabicParenR"/>
+            </a:pPr>
+            <a:r>
+              <a:rPr lang="en-US" sz="2400" dirty="0">
+                <a:solidFill>
+                  <a:schemeClr val="accent6">
+                    <a:lumMod val="60000"/>
+                    <a:lumOff val="40000"/>
+                  </a:schemeClr>
+                </a:solidFill>
+              </a:rPr>
+              <a:t>Upload your PDF resume on </a:t>
+            </a:r>
+            <a:r>
+              <a:rPr lang="en-US" sz="2400" dirty="0" err="1">
+                <a:solidFill>
+                  <a:schemeClr val="accent6">
+                    <a:lumMod val="60000"/>
+                    <a:lumOff val="40000"/>
+                  </a:schemeClr>
+                </a:solidFill>
+              </a:rPr>
+              <a:t>chatGPT</a:t>
+            </a:r>
+            <a:r>
+              <a:rPr lang="en-US" sz="2400" dirty="0">
+                <a:solidFill>
+                  <a:schemeClr val="accent6">
+                    <a:lumMod val="60000"/>
+                    <a:lumOff val="40000"/>
+                  </a:schemeClr>
+                </a:solidFill>
+              </a:rPr>
+              <a:t> and can it answer questions about your resume now ?</a:t>
+            </a:r>
+          </a:p>
+          <a:p>
+            <a:pPr marL="457200" indent="-457200">
+              <a:buAutoNum type="arabicParenR"/>
+            </a:pPr>
+            <a:r>
+              <a:rPr lang="en-US" sz="2400" dirty="0">
+                <a:solidFill>
+                  <a:schemeClr val="accent6">
+                    <a:lumMod val="60000"/>
+                    <a:lumOff val="40000"/>
+                  </a:schemeClr>
+                </a:solidFill>
+              </a:rPr>
+              <a:t>What is RAG ?</a:t>
+            </a:r>
+          </a:p>
+          <a:p>
+            <a:pPr marL="457200" indent="-457200">
+              <a:buAutoNum type="arabicParenR"/>
+            </a:pPr>
+            <a:r>
+              <a:rPr lang="en-US" sz="2400" dirty="0">
+                <a:solidFill>
+                  <a:schemeClr val="accent6">
+                    <a:lumMod val="60000"/>
+                    <a:lumOff val="40000"/>
+                  </a:schemeClr>
+                </a:solidFill>
+              </a:rPr>
+              <a:t>What is an ingestion phase in RAG ?</a:t>
+            </a:r>
+          </a:p>
+          <a:p>
+            <a:pPr marL="457200" indent="-457200">
+              <a:buAutoNum type="arabicParenR"/>
+            </a:pPr>
+            <a:r>
+              <a:rPr lang="en-US" sz="2400" dirty="0">
+                <a:solidFill>
+                  <a:schemeClr val="accent6">
+                    <a:lumMod val="60000"/>
+                    <a:lumOff val="40000"/>
+                  </a:schemeClr>
+                </a:solidFill>
+              </a:rPr>
+              <a:t>What is a retrieval and generation phase in RAG ?</a:t>
+            </a:r>
+          </a:p>
+          <a:p>
+            <a:pPr marL="457200" indent="-457200">
+              <a:buAutoNum type="arabicParenR"/>
+            </a:pPr>
+            <a:r>
+              <a:rPr lang="en-US" sz="2400" dirty="0">
+                <a:solidFill>
+                  <a:schemeClr val="accent6">
+                    <a:lumMod val="60000"/>
+                    <a:lumOff val="40000"/>
+                  </a:schemeClr>
+                </a:solidFill>
+              </a:rPr>
+              <a:t>What is embedding ?</a:t>
+            </a:r>
+          </a:p>
+          <a:p>
+            <a:pPr marL="457200" indent="-457200">
+              <a:buAutoNum type="arabicParenR"/>
+            </a:pPr>
+            <a:r>
+              <a:rPr lang="en-US" sz="2400" dirty="0">
+                <a:solidFill>
+                  <a:schemeClr val="accent6">
+                    <a:lumMod val="60000"/>
+                    <a:lumOff val="40000"/>
+                  </a:schemeClr>
+                </a:solidFill>
+              </a:rPr>
+              <a:t>Does a user query get converted into a vector ? Why ?</a:t>
+            </a:r>
+          </a:p>
+          <a:p>
+            <a:pPr marL="457200" indent="-457200">
+              <a:buAutoNum type="arabicParenR"/>
+            </a:pPr>
+            <a:r>
+              <a:rPr lang="en-US" sz="2400" dirty="0">
+                <a:solidFill>
+                  <a:schemeClr val="accent6">
+                    <a:lumMod val="60000"/>
+                    <a:lumOff val="40000"/>
+                  </a:schemeClr>
+                </a:solidFill>
+              </a:rPr>
+              <a:t>What is benefit of RAG ?</a:t>
+            </a:r>
+          </a:p>
+          <a:p>
+            <a:pPr marL="457200" indent="-457200">
+              <a:buAutoNum type="arabicParenR"/>
+            </a:pPr>
+            <a:r>
+              <a:rPr lang="en-US" sz="2400" dirty="0">
+                <a:solidFill>
+                  <a:schemeClr val="accent6">
+                    <a:lumMod val="60000"/>
+                    <a:lumOff val="40000"/>
+                  </a:schemeClr>
+                </a:solidFill>
+              </a:rPr>
+              <a:t>What type of data can an organization have ?</a:t>
+            </a:r>
+          </a:p>
+          <a:p>
+            <a:pPr marL="457200" indent="-457200">
+              <a:buAutoNum type="arabicParenR"/>
+            </a:pPr>
+            <a:endParaRPr lang="en-US" sz="2400" dirty="0">
+              <a:solidFill>
+                <a:schemeClr val="accent6">
+                  <a:lumMod val="60000"/>
+                  <a:lumOff val="40000"/>
+                </a:schemeClr>
+              </a:solidFill>
+            </a:endParaRPr>
+          </a:p>
+          <a:p>
+            <a:pPr marL="457200" indent="-457200">
+              <a:buAutoNum type="arabicParenR"/>
+            </a:pPr>
+            <a:endParaRPr lang="en-US" sz="2400" dirty="0">
               <a:solidFill>
                 <a:schemeClr val="accent6">
                   <a:lumMod val="60000"/>
@@ -16747,7 +17899,7 @@
         <p:spPr>
           <a:xfrm>
             <a:off x="74772" y="848421"/>
-            <a:ext cx="9582912" cy="1569660"/>
+            <a:ext cx="9582912" cy="2308324"/>
           </a:xfrm>
           <a:prstGeom prst="rect">
             <a:avLst/>
@@ -16802,7 +17954,30 @@
                   </a:schemeClr>
                 </a:solidFill>
               </a:rPr>
-              <a:t>Ans: No!</a:t>
+              <a:t>Ans: No!  - It does NOT have access to your personal data</a:t>
+            </a:r>
+          </a:p>
+          <a:p>
+            <a:endParaRPr lang="en-US" sz="2400" i="1" dirty="0">
+              <a:solidFill>
+                <a:schemeClr val="accent6">
+                  <a:lumMod val="60000"/>
+                  <a:lumOff val="40000"/>
+                </a:schemeClr>
+              </a:solidFill>
+            </a:endParaRPr>
+          </a:p>
+          <a:p>
+            <a:r>
+              <a:rPr lang="en-US" sz="2400" i="1" dirty="0">
+                <a:solidFill>
+                  <a:schemeClr val="accent6">
+                    <a:lumMod val="60000"/>
+                    <a:lumOff val="40000"/>
+                  </a:schemeClr>
+                </a:solidFill>
+              </a:rPr>
+              <a:t>EXAMPLE: It cannot answer questions related to your resume</a:t>
             </a:r>
           </a:p>
         </p:txBody>
@@ -18542,7 +19717,7 @@
         <p:spPr>
           <a:xfrm>
             <a:off x="180672" y="260606"/>
-            <a:ext cx="7121144" cy="5262979"/>
+            <a:ext cx="8247072" cy="6001643"/>
           </a:xfrm>
           <a:prstGeom prst="rect">
             <a:avLst/>
@@ -18617,9 +19792,9 @@
             </a:r>
           </a:p>
           <a:p>
-            <a:pPr marL="342900" indent="-342900">
-              <a:buFont typeface="Arial" panose="020B0604020202020204" pitchFamily="34" charset="0"/>
-              <a:buChar char="•"/>
+            <a:pPr marL="457200" indent="-457200">
+              <a:buFont typeface="+mj-lt"/>
+              <a:buAutoNum type="arabicPeriod"/>
             </a:pPr>
             <a:r>
               <a:rPr lang="en-US" sz="2400" dirty="0">
@@ -18653,9 +19828,9 @@
             </a:endParaRPr>
           </a:p>
           <a:p>
-            <a:pPr marL="342900" indent="-342900">
-              <a:buFont typeface="Arial" panose="020B0604020202020204" pitchFamily="34" charset="0"/>
-              <a:buChar char="•"/>
+            <a:pPr marL="457200" indent="-457200">
+              <a:buFont typeface="+mj-lt"/>
+              <a:buAutoNum type="arabicPeriod"/>
             </a:pPr>
             <a:r>
               <a:rPr lang="en-US" sz="2400" dirty="0">
@@ -18689,9 +19864,9 @@
             </a:endParaRPr>
           </a:p>
           <a:p>
-            <a:pPr marL="342900" indent="-342900">
-              <a:buFont typeface="Arial" panose="020B0604020202020204" pitchFamily="34" charset="0"/>
-              <a:buChar char="•"/>
+            <a:pPr marL="457200" indent="-457200">
+              <a:buFont typeface="+mj-lt"/>
+              <a:buAutoNum type="arabicPeriod"/>
             </a:pPr>
             <a:r>
               <a:rPr lang="en-US" sz="2400" dirty="0">
@@ -18776,19 +19951,10 @@
                   </a:schemeClr>
                 </a:solidFill>
               </a:rPr>
-              <a:t>"What is my company, </a:t>
+              <a:t>"What is my company, Loxford Academy, policy on </a:t>
             </a:r>
-            <a:r>
-              <a:rPr lang="en-US" sz="2400" i="1" dirty="0" err="1">
-                <a:solidFill>
-                  <a:schemeClr val="accent6">
-                    <a:lumMod val="60000"/>
-                    <a:lumOff val="40000"/>
-                  </a:schemeClr>
-                </a:solidFill>
-              </a:rPr>
-              <a:t>Loxford</a:t>
-            </a:r>
+          </a:p>
+          <a:p>
             <a:r>
               <a:rPr lang="en-US" sz="2400" i="1" dirty="0">
                 <a:solidFill>
@@ -18798,7 +19964,7 @@
                   </a:schemeClr>
                 </a:solidFill>
               </a:rPr>
-              <a:t> Academy, policy?"</a:t>
+              <a:t>Pay raise ?"</a:t>
             </a:r>
             <a:br>
               <a:rPr lang="en-US" sz="2400" dirty="0">
@@ -18810,6 +19976,16 @@
                 </a:solidFill>
               </a:rPr>
             </a:br>
+            <a:endParaRPr lang="en-US" sz="2400" dirty="0">
+              <a:solidFill>
+                <a:schemeClr val="accent6">
+                  <a:lumMod val="60000"/>
+                  <a:lumOff val="40000"/>
+                </a:schemeClr>
+              </a:solidFill>
+            </a:endParaRPr>
+          </a:p>
+          <a:p>
             <a:r>
               <a:rPr lang="en-US" sz="2400" dirty="0">
                 <a:solidFill>
@@ -18895,7 +20071,29 @@
                   </a:schemeClr>
                 </a:solidFill>
               </a:rPr>
-              <a:t>Normal Flow: Without RAG</a:t>
+              <a:t>Normal Flow: </a:t>
+            </a:r>
+            <a:r>
+              <a:rPr lang="en-US" b="1" dirty="0">
+                <a:solidFill>
+                  <a:schemeClr val="accent6">
+                    <a:lumMod val="60000"/>
+                    <a:lumOff val="40000"/>
+                  </a:schemeClr>
+                </a:solidFill>
+              </a:rPr>
+              <a:t>Without</a:t>
+            </a:r>
+            <a:r>
+              <a:rPr lang="en-US" dirty="0">
+                <a:solidFill>
+                  <a:schemeClr val="accent6">
+                    <a:lumMod val="60000"/>
+                    <a:lumOff val="40000"/>
+                  </a:schemeClr>
+                </a:solidFill>
+              </a:rPr>
+              <a:t> RAG</a:t>
             </a:r>
           </a:p>
         </p:txBody>
@@ -20533,7 +21731,7 @@
         <p:spPr>
           <a:xfrm>
             <a:off x="343940" y="393992"/>
-            <a:ext cx="6417056" cy="3416320"/>
+            <a:ext cx="6417056" cy="3046988"/>
           </a:xfrm>
           <a:prstGeom prst="rect">
             <a:avLst/>
@@ -20611,7 +21809,7 @@
                   </a:schemeClr>
                 </a:solidFill>
               </a:rPr>
-              <a:t> where a language model (like GPT) </a:t>
+              <a:t> in which </a:t>
             </a:r>
           </a:p>
           <a:p>
@@ -20628,7 +21826,7 @@
                   </a:schemeClr>
                 </a:solidFill>
               </a:rPr>
-              <a:t>first </a:t>
+              <a:t>System first </a:t>
             </a:r>
             <a:r>
               <a:rPr lang="en-US" sz="2400" b="1" dirty="0">
@@ -20639,7 +21837,7 @@
                   </a:schemeClr>
                 </a:solidFill>
               </a:rPr>
-              <a:t>retrieves relevant information from an external source</a:t>
+              <a:t>retrieves relevant information from an external-private source</a:t>
             </a:r>
             <a:r>
               <a:rPr lang="en-US" sz="2400" dirty="0">
@@ -27512,608 +28710,6 @@
         <p:cNvPr id="1" name="">
           <a:extLst>
             <a:ext uri="{FF2B5EF4-FFF2-40B4-BE49-F238E27FC236}">
-              <a16:creationId xmlns:a16="http://schemas.microsoft.com/office/drawing/2014/main" id="{0B6B388F-D477-A5AD-03A2-B15517BD32C6}"/>
-            </a:ext>
-          </a:extLst>
-        </p:cNvPr>
-        <p:cNvGrpSpPr/>
-        <p:nvPr/>
-      </p:nvGrpSpPr>
-      <p:grpSpPr>
-        <a:xfrm>
-          <a:off x="0" y="0"/>
-          <a:ext cx="0" cy="0"/>
-          <a:chOff x="0" y="0"/>
-          <a:chExt cx="0" cy="0"/>
-        </a:xfrm>
-      </p:grpSpPr>
-      <p:sp>
-        <p:nvSpPr>
-          <p:cNvPr id="16" name="TextBox 15">
-            <a:extLst>
-              <a:ext uri="{FF2B5EF4-FFF2-40B4-BE49-F238E27FC236}">
-                <a16:creationId xmlns:a16="http://schemas.microsoft.com/office/drawing/2014/main" id="{52B6D01B-979F-BEC5-FB0C-3B357CB03589}"/>
-              </a:ext>
-            </a:extLst>
-          </p:cNvPr>
-          <p:cNvSpPr txBox="1"/>
-          <p:nvPr/>
-        </p:nvSpPr>
-        <p:spPr>
-          <a:xfrm>
-            <a:off x="256032" y="693105"/>
-            <a:ext cx="11548872" cy="5262979"/>
-          </a:xfrm>
-          <a:prstGeom prst="rect">
-            <a:avLst/>
-          </a:prstGeom>
-          <a:noFill/>
-        </p:spPr>
-        <p:txBody>
-          <a:bodyPr wrap="square">
-            <a:spAutoFit/>
-          </a:bodyPr>
-          <a:lstStyle/>
-          <a:p>
-            <a:pPr>
-              <a:buNone/>
-            </a:pPr>
-            <a:r>
-              <a:rPr lang="en-US" sz="2400" dirty="0">
-                <a:solidFill>
-                  <a:schemeClr val="accent6">
-                    <a:lumMod val="60000"/>
-                    <a:lumOff val="40000"/>
-                  </a:schemeClr>
-                </a:solidFill>
-                <a:latin typeface="Calibiri body"/>
-              </a:rPr>
-              <a:t>Beyond PDF/text/SQL, common enterprise RAG data sources include:</a:t>
-            </a:r>
-          </a:p>
-          <a:p>
-            <a:pPr>
-              <a:buNone/>
-            </a:pPr>
-            <a:endParaRPr lang="en-US" sz="2400" b="1" dirty="0">
-              <a:solidFill>
-                <a:schemeClr val="accent6">
-                  <a:lumMod val="60000"/>
-                  <a:lumOff val="40000"/>
-                </a:schemeClr>
-              </a:solidFill>
-              <a:latin typeface="Calibiri body"/>
-            </a:endParaRPr>
-          </a:p>
-          <a:p>
-            <a:pPr>
-              <a:buNone/>
-            </a:pPr>
-            <a:r>
-              <a:rPr lang="en-US" sz="2400" b="1" dirty="0">
-                <a:solidFill>
-                  <a:schemeClr val="accent6">
-                    <a:lumMod val="60000"/>
-                    <a:lumOff val="40000"/>
-                  </a:schemeClr>
-                </a:solidFill>
-                <a:latin typeface="Calibiri body"/>
-              </a:rPr>
-              <a:t>Documents &amp; files</a:t>
-            </a:r>
-            <a:endParaRPr lang="en-US" sz="2400" dirty="0">
-              <a:solidFill>
-                <a:schemeClr val="accent6">
-                  <a:lumMod val="60000"/>
-                  <a:lumOff val="40000"/>
-                </a:schemeClr>
-              </a:solidFill>
-              <a:latin typeface="Calibiri body"/>
-            </a:endParaRPr>
-          </a:p>
-          <a:p>
-            <a:pPr marL="342900" lvl="0" indent="-342900">
-              <a:buFont typeface="Arial" panose="020B0604020202020204" pitchFamily="34" charset="0"/>
-              <a:buChar char="•"/>
-            </a:pPr>
-            <a:r>
-              <a:rPr lang="en-US" sz="2400" dirty="0">
-                <a:solidFill>
-                  <a:schemeClr val="accent6">
-                    <a:lumMod val="60000"/>
-                    <a:lumOff val="40000"/>
-                  </a:schemeClr>
-                </a:solidFill>
-                <a:latin typeface="Calibiri body"/>
-              </a:rPr>
-              <a:t>Office formats: Word, Excel, PowerPoint (often converted to Markdown/text )</a:t>
-            </a:r>
-          </a:p>
-          <a:p>
-            <a:pPr marL="342900" lvl="0" indent="-342900">
-              <a:buFont typeface="Arial" panose="020B0604020202020204" pitchFamily="34" charset="0"/>
-              <a:buChar char="•"/>
-            </a:pPr>
-            <a:r>
-              <a:rPr lang="en-US" sz="2400" dirty="0">
-                <a:solidFill>
-                  <a:schemeClr val="accent6">
-                    <a:lumMod val="60000"/>
-                    <a:lumOff val="40000"/>
-                  </a:schemeClr>
-                </a:solidFill>
-                <a:latin typeface="Calibiri body"/>
-              </a:rPr>
-              <a:t>Wikis/knowledge bases: Confluence, Notion, SharePoint, internal wikis</a:t>
-            </a:r>
-          </a:p>
-          <a:p>
-            <a:pPr marL="342900" lvl="0" indent="-342900">
-              <a:buFont typeface="Arial" panose="020B0604020202020204" pitchFamily="34" charset="0"/>
-              <a:buChar char="•"/>
-            </a:pPr>
-            <a:r>
-              <a:rPr lang="en-US" sz="2400" dirty="0">
-                <a:solidFill>
-                  <a:schemeClr val="accent6">
-                    <a:lumMod val="60000"/>
-                    <a:lumOff val="40000"/>
-                  </a:schemeClr>
-                </a:solidFill>
-                <a:latin typeface="Calibiri body"/>
-              </a:rPr>
-              <a:t>Cloud drives: Google Drive, OneDrive, Dropbox</a:t>
-            </a:r>
-          </a:p>
-          <a:p>
-            <a:pPr marL="342900" lvl="0" indent="-342900">
-              <a:buFont typeface="Arial" panose="020B0604020202020204" pitchFamily="34" charset="0"/>
-              <a:buChar char="•"/>
-            </a:pPr>
-            <a:endParaRPr lang="en-US" sz="2400" dirty="0">
-              <a:solidFill>
-                <a:schemeClr val="accent6">
-                  <a:lumMod val="60000"/>
-                  <a:lumOff val="40000"/>
-                </a:schemeClr>
-              </a:solidFill>
-              <a:latin typeface="Calibiri body"/>
-            </a:endParaRPr>
-          </a:p>
-          <a:p>
-            <a:pPr marL="342900" lvl="0" indent="-342900">
-              <a:buFont typeface="Arial" panose="020B0604020202020204" pitchFamily="34" charset="0"/>
-              <a:buChar char="•"/>
-            </a:pPr>
-            <a:endParaRPr lang="en-US" sz="2400" dirty="0">
-              <a:solidFill>
-                <a:schemeClr val="accent6">
-                  <a:lumMod val="60000"/>
-                  <a:lumOff val="40000"/>
-                </a:schemeClr>
-              </a:solidFill>
-              <a:latin typeface="Calibiri body"/>
-            </a:endParaRPr>
-          </a:p>
-          <a:p>
-            <a:pPr>
-              <a:buNone/>
-            </a:pPr>
-            <a:r>
-              <a:rPr lang="en-US" sz="2400" b="1" dirty="0">
-                <a:solidFill>
-                  <a:schemeClr val="accent6">
-                    <a:lumMod val="60000"/>
-                    <a:lumOff val="40000"/>
-                  </a:schemeClr>
-                </a:solidFill>
-                <a:latin typeface="Calibiri body"/>
-              </a:rPr>
-              <a:t>Structured data</a:t>
-            </a:r>
-            <a:endParaRPr lang="en-US" sz="2400" dirty="0">
-              <a:solidFill>
-                <a:schemeClr val="accent6">
-                  <a:lumMod val="60000"/>
-                  <a:lumOff val="40000"/>
-                </a:schemeClr>
-              </a:solidFill>
-              <a:latin typeface="Calibiri body"/>
-            </a:endParaRPr>
-          </a:p>
-          <a:p>
-            <a:pPr marL="342900" lvl="0" indent="-342900">
-              <a:buFont typeface="Arial" panose="020B0604020202020204" pitchFamily="34" charset="0"/>
-              <a:buChar char="•"/>
-            </a:pPr>
-            <a:r>
-              <a:rPr lang="en-US" sz="2400" dirty="0">
-                <a:solidFill>
-                  <a:schemeClr val="accent6">
-                    <a:lumMod val="60000"/>
-                    <a:lumOff val="40000"/>
-                  </a:schemeClr>
-                </a:solidFill>
-                <a:latin typeface="Calibiri body"/>
-              </a:rPr>
-              <a:t>Relational DBs: SQLite, Postgres, MySQL, SQL Server, Oracle</a:t>
-            </a:r>
-          </a:p>
-          <a:p>
-            <a:pPr marL="342900" lvl="0" indent="-342900">
-              <a:buFont typeface="Arial" panose="020B0604020202020204" pitchFamily="34" charset="0"/>
-              <a:buChar char="•"/>
-            </a:pPr>
-            <a:r>
-              <a:rPr lang="en-US" sz="2400" dirty="0">
-                <a:solidFill>
-                  <a:schemeClr val="accent6">
-                    <a:lumMod val="60000"/>
-                    <a:lumOff val="40000"/>
-                  </a:schemeClr>
-                </a:solidFill>
-                <a:latin typeface="Calibiri body"/>
-              </a:rPr>
-              <a:t>Data warehouses: Snowflake, </a:t>
-            </a:r>
-            <a:r>
-              <a:rPr lang="en-US" sz="2400" dirty="0" err="1">
-                <a:solidFill>
-                  <a:schemeClr val="accent6">
-                    <a:lumMod val="60000"/>
-                    <a:lumOff val="40000"/>
-                  </a:schemeClr>
-                </a:solidFill>
-                <a:latin typeface="Calibiri body"/>
-              </a:rPr>
-              <a:t>BigQuery</a:t>
-            </a:r>
-            <a:r>
-              <a:rPr lang="en-US" sz="2400" dirty="0">
-                <a:solidFill>
-                  <a:schemeClr val="accent6">
-                    <a:lumMod val="60000"/>
-                    <a:lumOff val="40000"/>
-                  </a:schemeClr>
-                </a:solidFill>
-                <a:latin typeface="Calibiri body"/>
-              </a:rPr>
-              <a:t>, Redshift — for analytics-heavy queries at larger scale</a:t>
-            </a:r>
-          </a:p>
-          <a:p>
-            <a:pPr marL="342900" lvl="0" indent="-342900">
-              <a:buFont typeface="Arial" panose="020B0604020202020204" pitchFamily="34" charset="0"/>
-              <a:buChar char="•"/>
-            </a:pPr>
-            <a:r>
-              <a:rPr lang="en-US" sz="2400" dirty="0">
-                <a:solidFill>
-                  <a:schemeClr val="accent6">
-                    <a:lumMod val="60000"/>
-                    <a:lumOff val="40000"/>
-                  </a:schemeClr>
-                </a:solidFill>
-                <a:latin typeface="Calibiri body"/>
-              </a:rPr>
-              <a:t>NoSQL: MongoDB, Elasticsearch — common for logs, product catalogs, semi-structured records</a:t>
-            </a:r>
-          </a:p>
-        </p:txBody>
-      </p:sp>
-    </p:spTree>
-    <p:extLst>
-      <p:ext uri="{BB962C8B-B14F-4D97-AF65-F5344CB8AC3E}">
-        <p14:creationId xmlns:p14="http://schemas.microsoft.com/office/powerpoint/2010/main" val="1497319111"/>
-      </p:ext>
-    </p:extLst>
-  </p:cSld>
-  <p:clrMapOvr>
-    <a:masterClrMapping/>
-  </p:clrMapOvr>
-</p:sld>
-</file>
-
-<file path=ppt/slides/slide7.xml><?xml version="1.0" encoding="utf-8"?>
-<p:sld xmlns:a="http://schemas.openxmlformats.org/drawingml/2006/main" xmlns:r="http://schemas.openxmlformats.org/officeDocument/2006/relationships" xmlns:p="http://schemas.openxmlformats.org/presentationml/2006/main">
-  <p:cSld>
-    <p:spTree>
-      <p:nvGrpSpPr>
-        <p:cNvPr id="1" name="">
-          <a:extLst>
-            <a:ext uri="{FF2B5EF4-FFF2-40B4-BE49-F238E27FC236}">
-              <a16:creationId xmlns:a16="http://schemas.microsoft.com/office/drawing/2014/main" id="{547418D3-81ED-25AD-40E9-0EB901FAE986}"/>
-            </a:ext>
-          </a:extLst>
-        </p:cNvPr>
-        <p:cNvGrpSpPr/>
-        <p:nvPr/>
-      </p:nvGrpSpPr>
-      <p:grpSpPr>
-        <a:xfrm>
-          <a:off x="0" y="0"/>
-          <a:ext cx="0" cy="0"/>
-          <a:chOff x="0" y="0"/>
-          <a:chExt cx="0" cy="0"/>
-        </a:xfrm>
-      </p:grpSpPr>
-      <p:sp>
-        <p:nvSpPr>
-          <p:cNvPr id="16" name="TextBox 15">
-            <a:extLst>
-              <a:ext uri="{FF2B5EF4-FFF2-40B4-BE49-F238E27FC236}">
-                <a16:creationId xmlns:a16="http://schemas.microsoft.com/office/drawing/2014/main" id="{93D2581E-F73E-FAEC-D352-F413AB0022AB}"/>
-              </a:ext>
-            </a:extLst>
-          </p:cNvPr>
-          <p:cNvSpPr txBox="1"/>
-          <p:nvPr/>
-        </p:nvSpPr>
-        <p:spPr>
-          <a:xfrm>
-            <a:off x="210312" y="1056007"/>
-            <a:ext cx="11896344" cy="5262979"/>
-          </a:xfrm>
-          <a:prstGeom prst="rect">
-            <a:avLst/>
-          </a:prstGeom>
-          <a:noFill/>
-        </p:spPr>
-        <p:txBody>
-          <a:bodyPr wrap="square">
-            <a:spAutoFit/>
-          </a:bodyPr>
-          <a:lstStyle/>
-          <a:p>
-            <a:pPr>
-              <a:buNone/>
-            </a:pPr>
-            <a:r>
-              <a:rPr lang="en-US" sz="2400" dirty="0">
-                <a:solidFill>
-                  <a:schemeClr val="accent6">
-                    <a:lumMod val="60000"/>
-                    <a:lumOff val="40000"/>
-                  </a:schemeClr>
-                </a:solidFill>
-                <a:latin typeface="Calibiri body"/>
-              </a:rPr>
-              <a:t>Beyond PDF/text/SQL, common enterprise RAG data sources include:</a:t>
-            </a:r>
-          </a:p>
-          <a:p>
-            <a:pPr>
-              <a:buNone/>
-            </a:pPr>
-            <a:endParaRPr lang="en-US" sz="2400" dirty="0">
-              <a:solidFill>
-                <a:schemeClr val="accent6">
-                  <a:lumMod val="60000"/>
-                  <a:lumOff val="40000"/>
-                </a:schemeClr>
-              </a:solidFill>
-              <a:latin typeface="Calibiri body"/>
-            </a:endParaRPr>
-          </a:p>
-          <a:p>
-            <a:pPr>
-              <a:buNone/>
-            </a:pPr>
-            <a:r>
-              <a:rPr lang="en-US" sz="2400" b="1" dirty="0">
-                <a:solidFill>
-                  <a:schemeClr val="accent6">
-                    <a:lumMod val="60000"/>
-                    <a:lumOff val="40000"/>
-                  </a:schemeClr>
-                </a:solidFill>
-                <a:latin typeface="Calibiri body"/>
-              </a:rPr>
-              <a:t>SaaS/collaboration tools</a:t>
-            </a:r>
-            <a:r>
-              <a:rPr lang="en-US" sz="2400" dirty="0">
-                <a:solidFill>
-                  <a:schemeClr val="accent6">
-                    <a:lumMod val="60000"/>
-                    <a:lumOff val="40000"/>
-                  </a:schemeClr>
-                </a:solidFill>
-                <a:latin typeface="Calibiri body"/>
-              </a:rPr>
-              <a:t> (usually pulled via API, not file scan)</a:t>
-            </a:r>
-          </a:p>
-          <a:p>
-            <a:pPr marL="342900" lvl="0" indent="-342900">
-              <a:buFont typeface="Arial" panose="020B0604020202020204" pitchFamily="34" charset="0"/>
-              <a:buChar char="•"/>
-            </a:pPr>
-            <a:r>
-              <a:rPr lang="en-US" sz="2400" dirty="0">
-                <a:solidFill>
-                  <a:schemeClr val="accent6">
-                    <a:lumMod val="60000"/>
-                    <a:lumOff val="40000"/>
-                  </a:schemeClr>
-                </a:solidFill>
-                <a:latin typeface="Calibiri body"/>
-              </a:rPr>
-              <a:t>Slack/Teams message history</a:t>
-            </a:r>
-          </a:p>
-          <a:p>
-            <a:pPr marL="342900" lvl="0" indent="-342900">
-              <a:buFont typeface="Arial" panose="020B0604020202020204" pitchFamily="34" charset="0"/>
-              <a:buChar char="•"/>
-            </a:pPr>
-            <a:r>
-              <a:rPr lang="en-US" sz="2400" dirty="0">
-                <a:solidFill>
-                  <a:schemeClr val="accent6">
-                    <a:lumMod val="60000"/>
-                    <a:lumOff val="40000"/>
-                  </a:schemeClr>
-                </a:solidFill>
-                <a:latin typeface="Calibiri body"/>
-              </a:rPr>
-              <a:t>Salesforce, Zendesk, Jira, ServiceNow — support tickets, CRM records</a:t>
-            </a:r>
-          </a:p>
-          <a:p>
-            <a:pPr marL="342900" lvl="0" indent="-342900">
-              <a:buFont typeface="Arial" panose="020B0604020202020204" pitchFamily="34" charset="0"/>
-              <a:buChar char="•"/>
-            </a:pPr>
-            <a:r>
-              <a:rPr lang="en-US" sz="2400" dirty="0">
-                <a:solidFill>
-                  <a:schemeClr val="accent6">
-                    <a:lumMod val="60000"/>
-                    <a:lumOff val="40000"/>
-                  </a:schemeClr>
-                </a:solidFill>
-                <a:latin typeface="Calibiri body"/>
-              </a:rPr>
-              <a:t>Email (Outlook/Exchange, Gmail) — often the messiest source, needs heavy de-dup/PII filtering</a:t>
-            </a:r>
-          </a:p>
-          <a:p>
-            <a:pPr marL="342900" lvl="0" indent="-342900">
-              <a:buFont typeface="Arial" panose="020B0604020202020204" pitchFamily="34" charset="0"/>
-              <a:buChar char="•"/>
-            </a:pPr>
-            <a:endParaRPr lang="en-US" sz="2400" dirty="0">
-              <a:solidFill>
-                <a:schemeClr val="accent6">
-                  <a:lumMod val="60000"/>
-                  <a:lumOff val="40000"/>
-                </a:schemeClr>
-              </a:solidFill>
-              <a:latin typeface="Calibiri body"/>
-            </a:endParaRPr>
-          </a:p>
-          <a:p>
-            <a:pPr>
-              <a:buNone/>
-            </a:pPr>
-            <a:r>
-              <a:rPr lang="en-US" sz="2400" b="1" dirty="0">
-                <a:solidFill>
-                  <a:schemeClr val="accent6">
-                    <a:lumMod val="60000"/>
-                    <a:lumOff val="40000"/>
-                  </a:schemeClr>
-                </a:solidFill>
-                <a:latin typeface="Calibiri body"/>
-              </a:rPr>
-              <a:t>Other</a:t>
-            </a:r>
-            <a:endParaRPr lang="en-US" sz="2400" dirty="0">
-              <a:solidFill>
-                <a:schemeClr val="accent6">
-                  <a:lumMod val="60000"/>
-                  <a:lumOff val="40000"/>
-                </a:schemeClr>
-              </a:solidFill>
-              <a:latin typeface="Calibiri body"/>
-            </a:endParaRPr>
-          </a:p>
-          <a:p>
-            <a:pPr marL="342900" lvl="0" indent="-342900">
-              <a:buFont typeface="Arial" panose="020B0604020202020204" pitchFamily="34" charset="0"/>
-              <a:buChar char="•"/>
-            </a:pPr>
-            <a:r>
-              <a:rPr lang="en-US" sz="2400" dirty="0">
-                <a:solidFill>
-                  <a:schemeClr val="accent6">
-                    <a:lumMod val="60000"/>
-                    <a:lumOff val="40000"/>
-                  </a:schemeClr>
-                </a:solidFill>
-                <a:latin typeface="Calibiri body"/>
-              </a:rPr>
-              <a:t>Web content: intranet sites, public site crawls</a:t>
-            </a:r>
-          </a:p>
-          <a:p>
-            <a:pPr marL="342900" lvl="0" indent="-342900">
-              <a:buFont typeface="Arial" panose="020B0604020202020204" pitchFamily="34" charset="0"/>
-              <a:buChar char="•"/>
-            </a:pPr>
-            <a:r>
-              <a:rPr lang="en-US" sz="2400" dirty="0">
-                <a:solidFill>
-                  <a:schemeClr val="accent6">
-                    <a:lumMod val="60000"/>
-                    <a:lumOff val="40000"/>
-                  </a:schemeClr>
-                </a:solidFill>
-                <a:latin typeface="Calibiri body"/>
-              </a:rPr>
-              <a:t>Code repos: for engineering-focused assistants (source + commit history)</a:t>
-            </a:r>
-          </a:p>
-          <a:p>
-            <a:pPr marL="342900" lvl="0" indent="-342900">
-              <a:buFont typeface="Arial" panose="020B0604020202020204" pitchFamily="34" charset="0"/>
-              <a:buChar char="•"/>
-            </a:pPr>
-            <a:r>
-              <a:rPr lang="en-US" sz="2400" dirty="0">
-                <a:solidFill>
-                  <a:schemeClr val="accent6">
-                    <a:lumMod val="60000"/>
-                    <a:lumOff val="40000"/>
-                  </a:schemeClr>
-                </a:solidFill>
-                <a:latin typeface="Calibiri body"/>
-              </a:rPr>
-              <a:t>Audio/video transcripts: call recordings, meeting notes (via a transcription step before chunking)</a:t>
-            </a:r>
-          </a:p>
-          <a:p>
-            <a:pPr marL="342900" lvl="0" indent="-342900">
-              <a:buFont typeface="Arial" panose="020B0604020202020204" pitchFamily="34" charset="0"/>
-              <a:buChar char="•"/>
-            </a:pPr>
-            <a:r>
-              <a:rPr lang="en-US" sz="2400" dirty="0">
-                <a:solidFill>
-                  <a:schemeClr val="accent6">
-                    <a:lumMod val="60000"/>
-                    <a:lumOff val="40000"/>
-                  </a:schemeClr>
-                </a:solidFill>
-                <a:latin typeface="Calibiri body"/>
-              </a:rPr>
-              <a:t>Scanned/image documents: examples -  pymupdf4llm for no-text-layer PDFs, etc.</a:t>
-            </a:r>
-          </a:p>
-        </p:txBody>
-      </p:sp>
-    </p:spTree>
-    <p:extLst>
-      <p:ext uri="{BB962C8B-B14F-4D97-AF65-F5344CB8AC3E}">
-        <p14:creationId xmlns:p14="http://schemas.microsoft.com/office/powerpoint/2010/main" val="2081135209"/>
-      </p:ext>
-    </p:extLst>
-  </p:cSld>
-  <p:clrMapOvr>
-    <a:masterClrMapping/>
-  </p:clrMapOvr>
-</p:sld>
-</file>
-
-<file path=ppt/slides/slide8.xml><?xml version="1.0" encoding="utf-8"?>
-<p:sld xmlns:a="http://schemas.openxmlformats.org/drawingml/2006/main" xmlns:r="http://schemas.openxmlformats.org/officeDocument/2006/relationships" xmlns:p="http://schemas.openxmlformats.org/presentationml/2006/main">
-  <p:cSld>
-    <p:spTree>
-      <p:nvGrpSpPr>
-        <p:cNvPr id="1" name="">
-          <a:extLst>
-            <a:ext uri="{FF2B5EF4-FFF2-40B4-BE49-F238E27FC236}">
               <a16:creationId xmlns:a16="http://schemas.microsoft.com/office/drawing/2014/main" id="{FA630FDD-CFDA-74A4-1105-21AE375C36CD}"/>
             </a:ext>
           </a:extLst>
@@ -28143,7 +28739,7 @@
         </p:nvSpPr>
         <p:spPr>
           <a:xfrm>
-            <a:off x="148336" y="80232"/>
+            <a:off x="189706" y="129296"/>
             <a:ext cx="10377488" cy="3416320"/>
           </a:xfrm>
           <a:prstGeom prst="rect">
@@ -28166,7 +28762,7 @@
                   </a:schemeClr>
                 </a:solidFill>
               </a:rPr>
-              <a:t>Now flow becomes:</a:t>
+              <a:t>Now RAG flow becomes:</a:t>
             </a:r>
           </a:p>
           <a:p>
@@ -28200,7 +28796,7 @@
                   </a:schemeClr>
                 </a:solidFill>
               </a:rPr>
-              <a:t>RAG system would search relevant documents</a:t>
+              <a:t>RAG system would search relevant documents related with query</a:t>
             </a:r>
           </a:p>
           <a:p>
@@ -31640,6 +32236,680 @@
 </p:sld>
 </file>
 
+<file path=ppt/slides/slide7.xml><?xml version="1.0" encoding="utf-8"?>
+<p:sld xmlns:a="http://schemas.openxmlformats.org/drawingml/2006/main" xmlns:r="http://schemas.openxmlformats.org/officeDocument/2006/relationships" xmlns:p="http://schemas.openxmlformats.org/presentationml/2006/main">
+  <p:cSld>
+    <p:spTree>
+      <p:nvGrpSpPr>
+        <p:cNvPr id="1" name="">
+          <a:extLst>
+            <a:ext uri="{FF2B5EF4-FFF2-40B4-BE49-F238E27FC236}">
+              <a16:creationId xmlns:a16="http://schemas.microsoft.com/office/drawing/2014/main" id="{0B6B388F-D477-A5AD-03A2-B15517BD32C6}"/>
+            </a:ext>
+          </a:extLst>
+        </p:cNvPr>
+        <p:cNvGrpSpPr/>
+        <p:nvPr/>
+      </p:nvGrpSpPr>
+      <p:grpSpPr>
+        <a:xfrm>
+          <a:off x="0" y="0"/>
+          <a:ext cx="0" cy="0"/>
+          <a:chOff x="0" y="0"/>
+          <a:chExt cx="0" cy="0"/>
+        </a:xfrm>
+      </p:grpSpPr>
+      <p:sp>
+        <p:nvSpPr>
+          <p:cNvPr id="16" name="TextBox 15">
+            <a:extLst>
+              <a:ext uri="{FF2B5EF4-FFF2-40B4-BE49-F238E27FC236}">
+                <a16:creationId xmlns:a16="http://schemas.microsoft.com/office/drawing/2014/main" id="{52B6D01B-979F-BEC5-FB0C-3B357CB03589}"/>
+              </a:ext>
+            </a:extLst>
+          </p:cNvPr>
+          <p:cNvSpPr txBox="1"/>
+          <p:nvPr/>
+        </p:nvSpPr>
+        <p:spPr>
+          <a:xfrm>
+            <a:off x="256032" y="693105"/>
+            <a:ext cx="11548872" cy="5262979"/>
+          </a:xfrm>
+          <a:prstGeom prst="rect">
+            <a:avLst/>
+          </a:prstGeom>
+          <a:noFill/>
+        </p:spPr>
+        <p:txBody>
+          <a:bodyPr wrap="square">
+            <a:spAutoFit/>
+          </a:bodyPr>
+          <a:lstStyle/>
+          <a:p>
+            <a:pPr>
+              <a:buNone/>
+            </a:pPr>
+            <a:r>
+              <a:rPr lang="en-US" sz="2400" dirty="0">
+                <a:solidFill>
+                  <a:schemeClr val="accent6">
+                    <a:lumMod val="60000"/>
+                    <a:lumOff val="40000"/>
+                  </a:schemeClr>
+                </a:solidFill>
+                <a:latin typeface="Calibiri body"/>
+              </a:rPr>
+              <a:t>Beyond PDF/text/SQL, common enterprise RAG data sources include:</a:t>
+            </a:r>
+          </a:p>
+          <a:p>
+            <a:pPr>
+              <a:buNone/>
+            </a:pPr>
+            <a:endParaRPr lang="en-US" sz="2400" b="1" dirty="0">
+              <a:solidFill>
+                <a:schemeClr val="accent6">
+                  <a:lumMod val="60000"/>
+                  <a:lumOff val="40000"/>
+                </a:schemeClr>
+              </a:solidFill>
+              <a:latin typeface="Calibiri body"/>
+            </a:endParaRPr>
+          </a:p>
+          <a:p>
+            <a:pPr>
+              <a:buNone/>
+            </a:pPr>
+            <a:r>
+              <a:rPr lang="en-US" sz="2400" b="1" u="sng" dirty="0">
+                <a:solidFill>
+                  <a:schemeClr val="accent6">
+                    <a:lumMod val="60000"/>
+                    <a:lumOff val="40000"/>
+                  </a:schemeClr>
+                </a:solidFill>
+                <a:latin typeface="Calibiri body"/>
+              </a:rPr>
+              <a:t>Documents &amp; files</a:t>
+            </a:r>
+            <a:endParaRPr lang="en-US" sz="2400" u="sng" dirty="0">
+              <a:solidFill>
+                <a:schemeClr val="accent6">
+                  <a:lumMod val="60000"/>
+                  <a:lumOff val="40000"/>
+                </a:schemeClr>
+              </a:solidFill>
+              <a:latin typeface="Calibiri body"/>
+            </a:endParaRPr>
+          </a:p>
+          <a:p>
+            <a:pPr marL="342900" lvl="0" indent="-342900">
+              <a:buFont typeface="Arial" panose="020B0604020202020204" pitchFamily="34" charset="0"/>
+              <a:buChar char="•"/>
+            </a:pPr>
+            <a:r>
+              <a:rPr lang="en-US" sz="2400" b="1" i="1" dirty="0">
+                <a:solidFill>
+                  <a:schemeClr val="accent6">
+                    <a:lumMod val="60000"/>
+                    <a:lumOff val="40000"/>
+                  </a:schemeClr>
+                </a:solidFill>
+                <a:latin typeface="Calibiri body"/>
+              </a:rPr>
+              <a:t>Office formats:</a:t>
+            </a:r>
+            <a:r>
+              <a:rPr lang="en-US" sz="2400" dirty="0">
+                <a:solidFill>
+                  <a:schemeClr val="accent6">
+                    <a:lumMod val="60000"/>
+                    <a:lumOff val="40000"/>
+                  </a:schemeClr>
+                </a:solidFill>
+                <a:latin typeface="Calibiri body"/>
+              </a:rPr>
+              <a:t> Word, Excel, PowerPoint (often converted to Markdown/text )</a:t>
+            </a:r>
+          </a:p>
+          <a:p>
+            <a:pPr marL="342900" lvl="0" indent="-342900">
+              <a:buFont typeface="Arial" panose="020B0604020202020204" pitchFamily="34" charset="0"/>
+              <a:buChar char="•"/>
+            </a:pPr>
+            <a:r>
+              <a:rPr lang="en-US" sz="2400" b="1" i="1" dirty="0">
+                <a:solidFill>
+                  <a:schemeClr val="accent6">
+                    <a:lumMod val="60000"/>
+                    <a:lumOff val="40000"/>
+                  </a:schemeClr>
+                </a:solidFill>
+                <a:latin typeface="Calibiri body"/>
+              </a:rPr>
+              <a:t>Wikis/knowledge bases:</a:t>
+            </a:r>
+            <a:r>
+              <a:rPr lang="en-US" sz="2400" dirty="0">
+                <a:solidFill>
+                  <a:schemeClr val="accent6">
+                    <a:lumMod val="60000"/>
+                    <a:lumOff val="40000"/>
+                  </a:schemeClr>
+                </a:solidFill>
+                <a:latin typeface="Calibiri body"/>
+              </a:rPr>
+              <a:t> Confluence, Notion, SharePoint, internal wikis</a:t>
+            </a:r>
+          </a:p>
+          <a:p>
+            <a:pPr marL="342900" lvl="0" indent="-342900">
+              <a:buFont typeface="Arial" panose="020B0604020202020204" pitchFamily="34" charset="0"/>
+              <a:buChar char="•"/>
+            </a:pPr>
+            <a:r>
+              <a:rPr lang="en-US" sz="2400" b="1" i="1" dirty="0">
+                <a:solidFill>
+                  <a:schemeClr val="accent6">
+                    <a:lumMod val="60000"/>
+                    <a:lumOff val="40000"/>
+                  </a:schemeClr>
+                </a:solidFill>
+                <a:latin typeface="Calibiri body"/>
+              </a:rPr>
+              <a:t>Cloud drives:</a:t>
+            </a:r>
+            <a:r>
+              <a:rPr lang="en-US" sz="2400" dirty="0">
+                <a:solidFill>
+                  <a:schemeClr val="accent6">
+                    <a:lumMod val="60000"/>
+                    <a:lumOff val="40000"/>
+                  </a:schemeClr>
+                </a:solidFill>
+                <a:latin typeface="Calibiri body"/>
+              </a:rPr>
+              <a:t> Google Drive, OneDrive, Dropbox</a:t>
+            </a:r>
+          </a:p>
+          <a:p>
+            <a:pPr marL="342900" lvl="0" indent="-342900">
+              <a:buFont typeface="Arial" panose="020B0604020202020204" pitchFamily="34" charset="0"/>
+              <a:buChar char="•"/>
+            </a:pPr>
+            <a:endParaRPr lang="en-US" sz="2400" dirty="0">
+              <a:solidFill>
+                <a:schemeClr val="accent6">
+                  <a:lumMod val="60000"/>
+                  <a:lumOff val="40000"/>
+                </a:schemeClr>
+              </a:solidFill>
+              <a:latin typeface="Calibiri body"/>
+            </a:endParaRPr>
+          </a:p>
+          <a:p>
+            <a:pPr marL="342900" lvl="0" indent="-342900">
+              <a:buFont typeface="Arial" panose="020B0604020202020204" pitchFamily="34" charset="0"/>
+              <a:buChar char="•"/>
+            </a:pPr>
+            <a:endParaRPr lang="en-US" sz="2400" dirty="0">
+              <a:solidFill>
+                <a:schemeClr val="accent6">
+                  <a:lumMod val="60000"/>
+                  <a:lumOff val="40000"/>
+                </a:schemeClr>
+              </a:solidFill>
+              <a:latin typeface="Calibiri body"/>
+            </a:endParaRPr>
+          </a:p>
+          <a:p>
+            <a:pPr>
+              <a:buNone/>
+            </a:pPr>
+            <a:r>
+              <a:rPr lang="en-US" sz="2400" b="1" u="sng" dirty="0">
+                <a:solidFill>
+                  <a:schemeClr val="accent6">
+                    <a:lumMod val="60000"/>
+                    <a:lumOff val="40000"/>
+                  </a:schemeClr>
+                </a:solidFill>
+                <a:latin typeface="Calibiri body"/>
+              </a:rPr>
+              <a:t>Structured data</a:t>
+            </a:r>
+            <a:endParaRPr lang="en-US" sz="2400" u="sng" dirty="0">
+              <a:solidFill>
+                <a:schemeClr val="accent6">
+                  <a:lumMod val="60000"/>
+                  <a:lumOff val="40000"/>
+                </a:schemeClr>
+              </a:solidFill>
+              <a:latin typeface="Calibiri body"/>
+            </a:endParaRPr>
+          </a:p>
+          <a:p>
+            <a:pPr marL="342900" lvl="0" indent="-342900">
+              <a:buFont typeface="Arial" panose="020B0604020202020204" pitchFamily="34" charset="0"/>
+              <a:buChar char="•"/>
+            </a:pPr>
+            <a:r>
+              <a:rPr lang="en-US" sz="2400" b="1" i="1" dirty="0">
+                <a:solidFill>
+                  <a:schemeClr val="accent6">
+                    <a:lumMod val="60000"/>
+                    <a:lumOff val="40000"/>
+                  </a:schemeClr>
+                </a:solidFill>
+                <a:latin typeface="Calibiri body"/>
+              </a:rPr>
+              <a:t>Relational DBs:</a:t>
+            </a:r>
+            <a:r>
+              <a:rPr lang="en-US" sz="2400" dirty="0">
+                <a:solidFill>
+                  <a:schemeClr val="accent6">
+                    <a:lumMod val="60000"/>
+                    <a:lumOff val="40000"/>
+                  </a:schemeClr>
+                </a:solidFill>
+                <a:latin typeface="Calibiri body"/>
+              </a:rPr>
+              <a:t> SQLite, Postgres, MySQL, SQL Server, Oracle</a:t>
+            </a:r>
+          </a:p>
+          <a:p>
+            <a:pPr marL="342900" lvl="0" indent="-342900">
+              <a:buFont typeface="Arial" panose="020B0604020202020204" pitchFamily="34" charset="0"/>
+              <a:buChar char="•"/>
+            </a:pPr>
+            <a:r>
+              <a:rPr lang="en-US" sz="2400" b="1" i="1" dirty="0">
+                <a:solidFill>
+                  <a:schemeClr val="accent6">
+                    <a:lumMod val="60000"/>
+                    <a:lumOff val="40000"/>
+                  </a:schemeClr>
+                </a:solidFill>
+                <a:latin typeface="Calibiri body"/>
+              </a:rPr>
+              <a:t>Data warehouses:</a:t>
+            </a:r>
+            <a:r>
+              <a:rPr lang="en-US" sz="2400" dirty="0">
+                <a:solidFill>
+                  <a:schemeClr val="accent6">
+                    <a:lumMod val="60000"/>
+                    <a:lumOff val="40000"/>
+                  </a:schemeClr>
+                </a:solidFill>
+                <a:latin typeface="Calibiri body"/>
+              </a:rPr>
+              <a:t> Snowflake, </a:t>
+            </a:r>
+            <a:r>
+              <a:rPr lang="en-US" sz="2400" dirty="0" err="1">
+                <a:solidFill>
+                  <a:schemeClr val="accent6">
+                    <a:lumMod val="60000"/>
+                    <a:lumOff val="40000"/>
+                  </a:schemeClr>
+                </a:solidFill>
+                <a:latin typeface="Calibiri body"/>
+              </a:rPr>
+              <a:t>BigQuery</a:t>
+            </a:r>
+            <a:r>
+              <a:rPr lang="en-US" sz="2400" dirty="0">
+                <a:solidFill>
+                  <a:schemeClr val="accent6">
+                    <a:lumMod val="60000"/>
+                    <a:lumOff val="40000"/>
+                  </a:schemeClr>
+                </a:solidFill>
+                <a:latin typeface="Calibiri body"/>
+              </a:rPr>
+              <a:t>, Redshift — for analytics-heavy queries at larger scale</a:t>
+            </a:r>
+          </a:p>
+          <a:p>
+            <a:pPr marL="342900" lvl="0" indent="-342900">
+              <a:buFont typeface="Arial" panose="020B0604020202020204" pitchFamily="34" charset="0"/>
+              <a:buChar char="•"/>
+            </a:pPr>
+            <a:r>
+              <a:rPr lang="en-US" sz="2400" b="1" i="1" dirty="0">
+                <a:solidFill>
+                  <a:schemeClr val="accent6">
+                    <a:lumMod val="60000"/>
+                    <a:lumOff val="40000"/>
+                  </a:schemeClr>
+                </a:solidFill>
+                <a:latin typeface="Calibiri body"/>
+              </a:rPr>
+              <a:t>NoSQL:</a:t>
+            </a:r>
+            <a:r>
+              <a:rPr lang="en-US" sz="2400" dirty="0">
+                <a:solidFill>
+                  <a:schemeClr val="accent6">
+                    <a:lumMod val="60000"/>
+                    <a:lumOff val="40000"/>
+                  </a:schemeClr>
+                </a:solidFill>
+                <a:latin typeface="Calibiri body"/>
+              </a:rPr>
+              <a:t> MongoDB, Elasticsearch — common for logs, product catalogs, semi-structured records</a:t>
+            </a:r>
+          </a:p>
+        </p:txBody>
+      </p:sp>
+    </p:spTree>
+    <p:extLst>
+      <p:ext uri="{BB962C8B-B14F-4D97-AF65-F5344CB8AC3E}">
+        <p14:creationId xmlns:p14="http://schemas.microsoft.com/office/powerpoint/2010/main" val="1497319111"/>
+      </p:ext>
+    </p:extLst>
+  </p:cSld>
+  <p:clrMapOvr>
+    <a:masterClrMapping/>
+  </p:clrMapOvr>
+</p:sld>
+</file>
+
+<file path=ppt/slides/slide8.xml><?xml version="1.0" encoding="utf-8"?>
+<p:sld xmlns:a="http://schemas.openxmlformats.org/drawingml/2006/main" xmlns:r="http://schemas.openxmlformats.org/officeDocument/2006/relationships" xmlns:p="http://schemas.openxmlformats.org/presentationml/2006/main">
+  <p:cSld>
+    <p:spTree>
+      <p:nvGrpSpPr>
+        <p:cNvPr id="1" name="">
+          <a:extLst>
+            <a:ext uri="{FF2B5EF4-FFF2-40B4-BE49-F238E27FC236}">
+              <a16:creationId xmlns:a16="http://schemas.microsoft.com/office/drawing/2014/main" id="{547418D3-81ED-25AD-40E9-0EB901FAE986}"/>
+            </a:ext>
+          </a:extLst>
+        </p:cNvPr>
+        <p:cNvGrpSpPr/>
+        <p:nvPr/>
+      </p:nvGrpSpPr>
+      <p:grpSpPr>
+        <a:xfrm>
+          <a:off x="0" y="0"/>
+          <a:ext cx="0" cy="0"/>
+          <a:chOff x="0" y="0"/>
+          <a:chExt cx="0" cy="0"/>
+        </a:xfrm>
+      </p:grpSpPr>
+      <p:sp>
+        <p:nvSpPr>
+          <p:cNvPr id="16" name="TextBox 15">
+            <a:extLst>
+              <a:ext uri="{FF2B5EF4-FFF2-40B4-BE49-F238E27FC236}">
+                <a16:creationId xmlns:a16="http://schemas.microsoft.com/office/drawing/2014/main" id="{93D2581E-F73E-FAEC-D352-F413AB0022AB}"/>
+              </a:ext>
+            </a:extLst>
+          </p:cNvPr>
+          <p:cNvSpPr txBox="1"/>
+          <p:nvPr/>
+        </p:nvSpPr>
+        <p:spPr>
+          <a:xfrm>
+            <a:off x="220144" y="692213"/>
+            <a:ext cx="11896344" cy="5262979"/>
+          </a:xfrm>
+          <a:prstGeom prst="rect">
+            <a:avLst/>
+          </a:prstGeom>
+          <a:noFill/>
+        </p:spPr>
+        <p:txBody>
+          <a:bodyPr wrap="square">
+            <a:spAutoFit/>
+          </a:bodyPr>
+          <a:lstStyle/>
+          <a:p>
+            <a:pPr>
+              <a:buNone/>
+            </a:pPr>
+            <a:r>
+              <a:rPr lang="en-US" sz="2400" dirty="0">
+                <a:solidFill>
+                  <a:schemeClr val="accent6">
+                    <a:lumMod val="60000"/>
+                    <a:lumOff val="40000"/>
+                  </a:schemeClr>
+                </a:solidFill>
+                <a:latin typeface="Calibiri body"/>
+              </a:rPr>
+              <a:t>Beyond PDF/text/SQL, common enterprise RAG data sources include:</a:t>
+            </a:r>
+          </a:p>
+          <a:p>
+            <a:pPr>
+              <a:buNone/>
+            </a:pPr>
+            <a:endParaRPr lang="en-US" sz="2400" dirty="0">
+              <a:solidFill>
+                <a:schemeClr val="accent6">
+                  <a:lumMod val="60000"/>
+                  <a:lumOff val="40000"/>
+                </a:schemeClr>
+              </a:solidFill>
+              <a:latin typeface="Calibiri body"/>
+            </a:endParaRPr>
+          </a:p>
+          <a:p>
+            <a:pPr>
+              <a:buNone/>
+            </a:pPr>
+            <a:r>
+              <a:rPr lang="en-US" sz="2400" b="1" u="sng" dirty="0">
+                <a:solidFill>
+                  <a:schemeClr val="accent6">
+                    <a:lumMod val="60000"/>
+                    <a:lumOff val="40000"/>
+                  </a:schemeClr>
+                </a:solidFill>
+                <a:latin typeface="Calibiri body"/>
+              </a:rPr>
+              <a:t>SaaS/collaboration tools</a:t>
+            </a:r>
+            <a:r>
+              <a:rPr lang="en-US" sz="2400" dirty="0">
+                <a:solidFill>
+                  <a:schemeClr val="accent6">
+                    <a:lumMod val="60000"/>
+                    <a:lumOff val="40000"/>
+                  </a:schemeClr>
+                </a:solidFill>
+                <a:latin typeface="Calibiri body"/>
+              </a:rPr>
+              <a:t> (usually pulled via API, not file scan)</a:t>
+            </a:r>
+          </a:p>
+          <a:p>
+            <a:pPr marL="342900" lvl="0" indent="-342900">
+              <a:buFont typeface="Arial" panose="020B0604020202020204" pitchFamily="34" charset="0"/>
+              <a:buChar char="•"/>
+            </a:pPr>
+            <a:r>
+              <a:rPr lang="en-US" sz="2400" dirty="0">
+                <a:solidFill>
+                  <a:schemeClr val="accent6">
+                    <a:lumMod val="60000"/>
+                    <a:lumOff val="40000"/>
+                  </a:schemeClr>
+                </a:solidFill>
+                <a:latin typeface="Calibiri body"/>
+              </a:rPr>
+              <a:t>Slack/Teams message history</a:t>
+            </a:r>
+          </a:p>
+          <a:p>
+            <a:pPr marL="342900" lvl="0" indent="-342900">
+              <a:buFont typeface="Arial" panose="020B0604020202020204" pitchFamily="34" charset="0"/>
+              <a:buChar char="•"/>
+            </a:pPr>
+            <a:r>
+              <a:rPr lang="en-US" sz="2400" dirty="0">
+                <a:solidFill>
+                  <a:schemeClr val="accent6">
+                    <a:lumMod val="60000"/>
+                    <a:lumOff val="40000"/>
+                  </a:schemeClr>
+                </a:solidFill>
+                <a:latin typeface="Calibiri body"/>
+              </a:rPr>
+              <a:t>Salesforce, Zendesk, Jira, ServiceNow — support tickets, CRM records</a:t>
+            </a:r>
+          </a:p>
+          <a:p>
+            <a:pPr marL="342900" lvl="0" indent="-342900">
+              <a:buFont typeface="Arial" panose="020B0604020202020204" pitchFamily="34" charset="0"/>
+              <a:buChar char="•"/>
+            </a:pPr>
+            <a:r>
+              <a:rPr lang="en-US" sz="2400" dirty="0">
+                <a:solidFill>
+                  <a:schemeClr val="accent6">
+                    <a:lumMod val="60000"/>
+                    <a:lumOff val="40000"/>
+                  </a:schemeClr>
+                </a:solidFill>
+                <a:latin typeface="Calibiri body"/>
+              </a:rPr>
+              <a:t>Email (Outlook/Exchange, Gmail) — often the messiest source, needs heavy de-dup/PII filtering</a:t>
+            </a:r>
+          </a:p>
+          <a:p>
+            <a:pPr marL="342900" lvl="0" indent="-342900">
+              <a:buFont typeface="Arial" panose="020B0604020202020204" pitchFamily="34" charset="0"/>
+              <a:buChar char="•"/>
+            </a:pPr>
+            <a:endParaRPr lang="en-US" sz="2400" dirty="0">
+              <a:solidFill>
+                <a:schemeClr val="accent6">
+                  <a:lumMod val="60000"/>
+                  <a:lumOff val="40000"/>
+                </a:schemeClr>
+              </a:solidFill>
+              <a:latin typeface="Calibiri body"/>
+            </a:endParaRPr>
+          </a:p>
+          <a:p>
+            <a:pPr>
+              <a:buNone/>
+            </a:pPr>
+            <a:r>
+              <a:rPr lang="en-US" sz="2400" b="1" u="sng" dirty="0">
+                <a:solidFill>
+                  <a:schemeClr val="accent6">
+                    <a:lumMod val="60000"/>
+                    <a:lumOff val="40000"/>
+                  </a:schemeClr>
+                </a:solidFill>
+                <a:latin typeface="Calibiri body"/>
+              </a:rPr>
+              <a:t>Other</a:t>
+            </a:r>
+            <a:endParaRPr lang="en-US" sz="2400" u="sng" dirty="0">
+              <a:solidFill>
+                <a:schemeClr val="accent6">
+                  <a:lumMod val="60000"/>
+                  <a:lumOff val="40000"/>
+                </a:schemeClr>
+              </a:solidFill>
+              <a:latin typeface="Calibiri body"/>
+            </a:endParaRPr>
+          </a:p>
+          <a:p>
+            <a:pPr marL="342900" lvl="0" indent="-342900">
+              <a:buFont typeface="Arial" panose="020B0604020202020204" pitchFamily="34" charset="0"/>
+              <a:buChar char="•"/>
+            </a:pPr>
+            <a:r>
+              <a:rPr lang="en-US" sz="2400" dirty="0">
+                <a:solidFill>
+                  <a:schemeClr val="accent6">
+                    <a:lumMod val="60000"/>
+                    <a:lumOff val="40000"/>
+                  </a:schemeClr>
+                </a:solidFill>
+                <a:latin typeface="Calibiri body"/>
+              </a:rPr>
+              <a:t>Web content: intranet sites, public site crawls</a:t>
+            </a:r>
+          </a:p>
+          <a:p>
+            <a:pPr marL="342900" lvl="0" indent="-342900">
+              <a:buFont typeface="Arial" panose="020B0604020202020204" pitchFamily="34" charset="0"/>
+              <a:buChar char="•"/>
+            </a:pPr>
+            <a:r>
+              <a:rPr lang="en-US" sz="2400" dirty="0">
+                <a:solidFill>
+                  <a:schemeClr val="accent6">
+                    <a:lumMod val="60000"/>
+                    <a:lumOff val="40000"/>
+                  </a:schemeClr>
+                </a:solidFill>
+                <a:latin typeface="Calibiri body"/>
+              </a:rPr>
+              <a:t>Code repos: for engineering-focused assistants (source + commit history)</a:t>
+            </a:r>
+          </a:p>
+          <a:p>
+            <a:pPr marL="342900" lvl="0" indent="-342900">
+              <a:buFont typeface="Arial" panose="020B0604020202020204" pitchFamily="34" charset="0"/>
+              <a:buChar char="•"/>
+            </a:pPr>
+            <a:r>
+              <a:rPr lang="en-US" sz="2400" dirty="0">
+                <a:solidFill>
+                  <a:schemeClr val="accent6">
+                    <a:lumMod val="60000"/>
+                    <a:lumOff val="40000"/>
+                  </a:schemeClr>
+                </a:solidFill>
+                <a:latin typeface="Calibiri body"/>
+              </a:rPr>
+              <a:t>Audio/video transcripts: call recordings, meeting notes (via a transcription step before chunking)</a:t>
+            </a:r>
+          </a:p>
+          <a:p>
+            <a:pPr marL="342900" lvl="0" indent="-342900">
+              <a:buFont typeface="Arial" panose="020B0604020202020204" pitchFamily="34" charset="0"/>
+              <a:buChar char="•"/>
+            </a:pPr>
+            <a:r>
+              <a:rPr lang="en-US" sz="2400" dirty="0">
+                <a:solidFill>
+                  <a:schemeClr val="accent6">
+                    <a:lumMod val="60000"/>
+                    <a:lumOff val="40000"/>
+                  </a:schemeClr>
+                </a:solidFill>
+                <a:latin typeface="Calibiri body"/>
+              </a:rPr>
+              <a:t>Scanned/image documents: examples -  pymupdf4llm for no-text-layer PDFs, etc.</a:t>
+            </a:r>
+          </a:p>
+        </p:txBody>
+      </p:sp>
+    </p:spTree>
+    <p:extLst>
+      <p:ext uri="{BB962C8B-B14F-4D97-AF65-F5344CB8AC3E}">
+        <p14:creationId xmlns:p14="http://schemas.microsoft.com/office/powerpoint/2010/main" val="2081135209"/>
+      </p:ext>
+    </p:extLst>
+  </p:cSld>
+  <p:clrMapOvr>
+    <a:masterClrMapping/>
+  </p:clrMapOvr>
+</p:sld>
+</file>
+
 <file path=ppt/slides/slide9.xml><?xml version="1.0" encoding="utf-8"?>
 <p:sld xmlns:a="http://schemas.openxmlformats.org/drawingml/2006/main" xmlns:r="http://schemas.openxmlformats.org/officeDocument/2006/relationships" xmlns:p="http://schemas.openxmlformats.org/presentationml/2006/main">
   <p:cSld>
@@ -31678,7 +32948,7 @@
         <p:spPr>
           <a:xfrm>
             <a:off x="230632" y="235680"/>
-            <a:ext cx="7102856" cy="830997"/>
+            <a:ext cx="7102856" cy="1569660"/>
           </a:xfrm>
           <a:prstGeom prst="rect">
             <a:avLst/>
@@ -31692,6 +32962,19 @@
           <a:lstStyle/>
           <a:p>
             <a:r>
+              <a:rPr lang="en-US" sz="2400" b="1" u="sng" dirty="0">
+                <a:solidFill>
+                  <a:schemeClr val="accent6">
+                    <a:lumMod val="60000"/>
+                    <a:lumOff val="40000"/>
+                  </a:schemeClr>
+                </a:solidFill>
+              </a:rPr>
+              <a:t>RAG Architecture/Process</a:t>
+            </a:r>
+          </a:p>
+          <a:p>
+            <a:r>
               <a:rPr lang="en-US" sz="2400" b="1" dirty="0">
                 <a:solidFill>
                   <a:schemeClr val="accent6">
@@ -31700,12 +32983,16 @@
                   </a:schemeClr>
                 </a:solidFill>
               </a:rPr>
-              <a:t>RAG Architecture/Process </a:t>
+              <a:t> </a:t>
             </a:r>
           </a:p>
           <a:p>
+            <a:pPr marL="342900" indent="-342900">
+              <a:buFont typeface="Arial" panose="020B0604020202020204" pitchFamily="34" charset="0"/>
+              <a:buChar char="•"/>
+            </a:pPr>
             <a:r>
-              <a:rPr lang="en-US" sz="2400" b="1" u="sng" dirty="0">
+              <a:rPr lang="en-US" sz="2400" b="1" i="1" dirty="0">
                 <a:solidFill>
                   <a:schemeClr val="accent6">
                     <a:lumMod val="60000"/>
@@ -31713,41 +33000,16 @@
                   </a:schemeClr>
                 </a:solidFill>
               </a:rPr>
-              <a:t>Phase A – Ingestion (Populate The Vector DB)</a:t>
+              <a:t>Phase A – Ingestion ( Populate The Vector DB )</a:t>
             </a:r>
           </a:p>
-        </p:txBody>
-      </p:sp>
-      <p:sp>
-        <p:nvSpPr>
-          <p:cNvPr id="5" name="TextBox 4">
-            <a:extLst>
-              <a:ext uri="{FF2B5EF4-FFF2-40B4-BE49-F238E27FC236}">
-                <a16:creationId xmlns:a16="http://schemas.microsoft.com/office/drawing/2014/main" id="{C559243F-6976-C66F-F511-2EB8936ED151}"/>
-              </a:ext>
-            </a:extLst>
-          </p:cNvPr>
-          <p:cNvSpPr txBox="1"/>
-          <p:nvPr/>
-        </p:nvSpPr>
-        <p:spPr>
-          <a:xfrm>
-            <a:off x="2647188" y="1292412"/>
-            <a:ext cx="3140964" cy="1015663"/>
-          </a:xfrm>
-          <a:prstGeom prst="rect">
-            <a:avLst/>
-          </a:prstGeom>
-          <a:noFill/>
-        </p:spPr>
-        <p:txBody>
-          <a:bodyPr wrap="square">
-            <a:spAutoFit/>
-          </a:bodyPr>
-          <a:lstStyle/>
           <a:p>
+            <a:pPr marL="342900" indent="-342900">
+              <a:buFont typeface="Arial" panose="020B0604020202020204" pitchFamily="34" charset="0"/>
+              <a:buChar char="•"/>
+            </a:pPr>
             <a:r>
-              <a:rPr lang="en-US" sz="2000" b="1" dirty="0">
+              <a:rPr lang="en-US" sz="2400" b="1" i="1" dirty="0">
                 <a:solidFill>
                   <a:schemeClr val="accent6">
                     <a:lumMod val="60000"/>
@@ -31755,232 +33017,7 @@
                   </a:schemeClr>
                 </a:solidFill>
               </a:rPr>
-              <a:t>2. Chunking</a:t>
-            </a:r>
-          </a:p>
-          <a:p>
-            <a:r>
-              <a:rPr lang="en-US" sz="2000" dirty="0">
-                <a:solidFill>
-                  <a:schemeClr val="accent6">
-                    <a:lumMod val="60000"/>
-                    <a:lumOff val="40000"/>
-                  </a:schemeClr>
-                </a:solidFill>
-              </a:rPr>
-              <a:t>Break data into small pieces</a:t>
-            </a:r>
-          </a:p>
-          <a:p>
-            <a:r>
-              <a:rPr lang="en-US" sz="2000" dirty="0">
-                <a:solidFill>
-                  <a:schemeClr val="accent6">
-                    <a:lumMod val="60000"/>
-                    <a:lumOff val="40000"/>
-                  </a:schemeClr>
-                </a:solidFill>
-              </a:rPr>
-              <a:t> (chunks)</a:t>
-            </a:r>
-          </a:p>
-        </p:txBody>
-      </p:sp>
-      <p:sp>
-        <p:nvSpPr>
-          <p:cNvPr id="10" name="TextBox 9">
-            <a:extLst>
-              <a:ext uri="{FF2B5EF4-FFF2-40B4-BE49-F238E27FC236}">
-                <a16:creationId xmlns:a16="http://schemas.microsoft.com/office/drawing/2014/main" id="{76BBB7B7-CF0B-FF3C-5A90-A69E6C54A709}"/>
-              </a:ext>
-            </a:extLst>
-          </p:cNvPr>
-          <p:cNvSpPr txBox="1"/>
-          <p:nvPr/>
-        </p:nvSpPr>
-        <p:spPr>
-          <a:xfrm>
-            <a:off x="6158484" y="1297770"/>
-            <a:ext cx="2848356" cy="1015663"/>
-          </a:xfrm>
-          <a:prstGeom prst="rect">
-            <a:avLst/>
-          </a:prstGeom>
-          <a:noFill/>
-        </p:spPr>
-        <p:txBody>
-          <a:bodyPr wrap="square">
-            <a:spAutoFit/>
-          </a:bodyPr>
-          <a:lstStyle/>
-          <a:p>
-            <a:r>
-              <a:rPr lang="en-US" sz="2000" b="1" dirty="0">
-                <a:solidFill>
-                  <a:schemeClr val="accent6">
-                    <a:lumMod val="60000"/>
-                    <a:lumOff val="40000"/>
-                  </a:schemeClr>
-                </a:solidFill>
-              </a:rPr>
-              <a:t>3. Embeddings</a:t>
-            </a:r>
-          </a:p>
-          <a:p>
-            <a:r>
-              <a:rPr lang="en-US" sz="2000" dirty="0">
-                <a:solidFill>
-                  <a:schemeClr val="accent6">
-                    <a:lumMod val="60000"/>
-                    <a:lumOff val="40000"/>
-                  </a:schemeClr>
-                </a:solidFill>
-              </a:rPr>
-              <a:t>Convert text into vectors using models</a:t>
-            </a:r>
-          </a:p>
-        </p:txBody>
-      </p:sp>
-      <p:sp>
-        <p:nvSpPr>
-          <p:cNvPr id="12" name="TextBox 11">
-            <a:extLst>
-              <a:ext uri="{FF2B5EF4-FFF2-40B4-BE49-F238E27FC236}">
-                <a16:creationId xmlns:a16="http://schemas.microsoft.com/office/drawing/2014/main" id="{2B4198E2-5DDD-8FD3-D524-579B91975B11}"/>
-              </a:ext>
-            </a:extLst>
-          </p:cNvPr>
-          <p:cNvSpPr txBox="1"/>
-          <p:nvPr/>
-        </p:nvSpPr>
-        <p:spPr>
-          <a:xfrm>
-            <a:off x="9075420" y="1246924"/>
-            <a:ext cx="2994660" cy="1323439"/>
-          </a:xfrm>
-          <a:prstGeom prst="rect">
-            <a:avLst/>
-          </a:prstGeom>
-          <a:noFill/>
-        </p:spPr>
-        <p:txBody>
-          <a:bodyPr wrap="square">
-            <a:spAutoFit/>
-          </a:bodyPr>
-          <a:lstStyle/>
-          <a:p>
-            <a:r>
-              <a:rPr lang="en-US" sz="2000" b="1" dirty="0">
-                <a:solidFill>
-                  <a:schemeClr val="accent6">
-                    <a:lumMod val="60000"/>
-                    <a:lumOff val="40000"/>
-                  </a:schemeClr>
-                </a:solidFill>
-              </a:rPr>
-              <a:t>4. Storage</a:t>
-            </a:r>
-          </a:p>
-          <a:p>
-            <a:r>
-              <a:rPr lang="en-US" sz="2000" dirty="0">
-                <a:solidFill>
-                  <a:schemeClr val="accent6">
-                    <a:lumMod val="60000"/>
-                    <a:lumOff val="40000"/>
-                  </a:schemeClr>
-                </a:solidFill>
-              </a:rPr>
-              <a:t>Store vectors in a database called Vector DB</a:t>
-            </a:r>
-            <a:br>
-              <a:rPr lang="en-US" sz="2000" dirty="0">
-                <a:solidFill>
-                  <a:schemeClr val="accent6">
-                    <a:lumMod val="60000"/>
-                    <a:lumOff val="40000"/>
-                  </a:schemeClr>
-                </a:solidFill>
-              </a:rPr>
-            </a:br>
-            <a:r>
-              <a:rPr lang="en-US" sz="2000" dirty="0">
-                <a:solidFill>
-                  <a:schemeClr val="accent6">
-                    <a:lumMod val="60000"/>
-                    <a:lumOff val="40000"/>
-                  </a:schemeClr>
-                </a:solidFill>
-              </a:rPr>
-              <a:t>(e.g., Pinecone, FAISS, etc.)</a:t>
-            </a:r>
-          </a:p>
-        </p:txBody>
-      </p:sp>
-      <p:sp>
-        <p:nvSpPr>
-          <p:cNvPr id="14" name="TextBox 13">
-            <a:extLst>
-              <a:ext uri="{FF2B5EF4-FFF2-40B4-BE49-F238E27FC236}">
-                <a16:creationId xmlns:a16="http://schemas.microsoft.com/office/drawing/2014/main" id="{443804D0-CC9E-470F-92B9-854E68B5F784}"/>
-              </a:ext>
-            </a:extLst>
-          </p:cNvPr>
-          <p:cNvSpPr txBox="1"/>
-          <p:nvPr/>
-        </p:nvSpPr>
-        <p:spPr>
-          <a:xfrm>
-            <a:off x="32004" y="1284839"/>
-            <a:ext cx="2980944" cy="1015663"/>
-          </a:xfrm>
-          <a:prstGeom prst="rect">
-            <a:avLst/>
-          </a:prstGeom>
-          <a:noFill/>
-        </p:spPr>
-        <p:txBody>
-          <a:bodyPr wrap="square">
-            <a:spAutoFit/>
-          </a:bodyPr>
-          <a:lstStyle/>
-          <a:p>
-            <a:r>
-              <a:rPr lang="en-US" sz="2000" b="1" dirty="0">
-                <a:solidFill>
-                  <a:schemeClr val="accent6">
-                    <a:lumMod val="60000"/>
-                    <a:lumOff val="40000"/>
-                  </a:schemeClr>
-                </a:solidFill>
-              </a:rPr>
-              <a:t>1. Data Collection</a:t>
-            </a:r>
-          </a:p>
-          <a:p>
-            <a:r>
-              <a:rPr lang="en-US" sz="2000" dirty="0">
-                <a:solidFill>
-                  <a:schemeClr val="accent6">
-                    <a:lumMod val="60000"/>
-                    <a:lumOff val="40000"/>
-                  </a:schemeClr>
-                </a:solidFill>
-              </a:rPr>
-              <a:t>Collect documents</a:t>
-            </a:r>
-          </a:p>
-          <a:p>
-            <a:r>
-              <a:rPr lang="en-US" sz="2000" dirty="0">
-                <a:solidFill>
-                  <a:schemeClr val="accent6">
-                    <a:lumMod val="60000"/>
-                    <a:lumOff val="40000"/>
-                  </a:schemeClr>
-                </a:solidFill>
-              </a:rPr>
-              <a:t> (PDFs, text, etc.)</a:t>
+              <a:t>Phase B – Retrieval + Generation ( User Query )</a:t>
             </a:r>
           </a:p>
         </p:txBody>
@@ -32015,498 +33052,6 @@
           </a:prstGeom>
         </p:spPr>
       </p:pic>
-      <p:grpSp>
-        <p:nvGrpSpPr>
-          <p:cNvPr id="25" name="Group 24">
-            <a:extLst>
-              <a:ext uri="{FF2B5EF4-FFF2-40B4-BE49-F238E27FC236}">
-                <a16:creationId xmlns:a16="http://schemas.microsoft.com/office/drawing/2014/main" id="{BCA29B37-AE00-EFA3-4749-216465F4D06A}"/>
-              </a:ext>
-            </a:extLst>
-          </p:cNvPr>
-          <p:cNvGrpSpPr/>
-          <p:nvPr/>
-        </p:nvGrpSpPr>
-        <p:grpSpPr>
-          <a:xfrm>
-            <a:off x="1151784" y="4918176"/>
-            <a:ext cx="296640" cy="330120"/>
-            <a:chOff x="1151784" y="4918176"/>
-            <a:chExt cx="296640" cy="330120"/>
-          </a:xfrm>
-        </p:grpSpPr>
-        <mc:AlternateContent xmlns:mc="http://schemas.openxmlformats.org/markup-compatibility/2006" xmlns:p14="http://schemas.microsoft.com/office/powerpoint/2010/main">
-          <mc:Choice Requires="p14">
-            <p:contentPart p14:bwMode="auto" r:id="rId3">
-              <p14:nvContentPartPr>
-                <p14:cNvPr id="17" name="Ink 16">
-                  <a:extLst>
-                    <a:ext uri="{FF2B5EF4-FFF2-40B4-BE49-F238E27FC236}">
-                      <a16:creationId xmlns:a16="http://schemas.microsoft.com/office/drawing/2014/main" id="{C07CFD25-91F1-7EC3-B10F-3843C213F326}"/>
-                    </a:ext>
-                  </a:extLst>
-                </p14:cNvPr>
-                <p14:cNvContentPartPr/>
-                <p14:nvPr/>
-              </p14:nvContentPartPr>
-              <p14:xfrm>
-                <a:off x="1313784" y="5012496"/>
-                <a:ext cx="48240" cy="172440"/>
-              </p14:xfrm>
-            </p:contentPart>
-          </mc:Choice>
-          <mc:Fallback xmlns="">
-            <p:pic>
-              <p:nvPicPr>
-                <p:cNvPr id="17" name="Ink 16">
-                  <a:extLst>
-                    <a:ext uri="{FF2B5EF4-FFF2-40B4-BE49-F238E27FC236}">
-                      <a16:creationId xmlns:a16="http://schemas.microsoft.com/office/drawing/2014/main" id="{C07CFD25-91F1-7EC3-B10F-3843C213F326}"/>
-                    </a:ext>
-                  </a:extLst>
-                </p:cNvPr>
-                <p:cNvPicPr/>
-                <p:nvPr/>
-              </p:nvPicPr>
-              <p:blipFill>
-                <a:blip r:embed="rId4"/>
-                <a:stretch>
-                  <a:fillRect/>
-                </a:stretch>
-              </p:blipFill>
-              <p:spPr>
-                <a:xfrm>
-                  <a:off x="1277784" y="4976496"/>
-                  <a:ext cx="119880" cy="244080"/>
-                </a:xfrm>
-                <a:prstGeom prst="rect">
-                  <a:avLst/>
-                </a:prstGeom>
-              </p:spPr>
-            </p:pic>
-          </mc:Fallback>
-        </mc:AlternateContent>
-        <mc:AlternateContent xmlns:mc="http://schemas.openxmlformats.org/markup-compatibility/2006" xmlns:p14="http://schemas.microsoft.com/office/powerpoint/2010/main">
-          <mc:Choice Requires="p14">
-            <p:contentPart p14:bwMode="auto" r:id="rId5">
-              <p14:nvContentPartPr>
-                <p14:cNvPr id="18" name="Ink 17">
-                  <a:extLst>
-                    <a:ext uri="{FF2B5EF4-FFF2-40B4-BE49-F238E27FC236}">
-                      <a16:creationId xmlns:a16="http://schemas.microsoft.com/office/drawing/2014/main" id="{D34FD8D5-451C-D920-49A8-D999BBFC2DC1}"/>
-                    </a:ext>
-                  </a:extLst>
-                </p14:cNvPr>
-                <p14:cNvContentPartPr/>
-                <p14:nvPr/>
-              </p14:nvContentPartPr>
-              <p14:xfrm>
-                <a:off x="1151784" y="4918176"/>
-                <a:ext cx="296640" cy="330120"/>
-              </p14:xfrm>
-            </p:contentPart>
-          </mc:Choice>
-          <mc:Fallback xmlns="">
-            <p:pic>
-              <p:nvPicPr>
-                <p:cNvPr id="18" name="Ink 17">
-                  <a:extLst>
-                    <a:ext uri="{FF2B5EF4-FFF2-40B4-BE49-F238E27FC236}">
-                      <a16:creationId xmlns:a16="http://schemas.microsoft.com/office/drawing/2014/main" id="{D34FD8D5-451C-D920-49A8-D999BBFC2DC1}"/>
-                    </a:ext>
-                  </a:extLst>
-                </p:cNvPr>
-                <p:cNvPicPr/>
-                <p:nvPr/>
-              </p:nvPicPr>
-              <p:blipFill>
-                <a:blip r:embed="rId6"/>
-                <a:stretch>
-                  <a:fillRect/>
-                </a:stretch>
-              </p:blipFill>
-              <p:spPr>
-                <a:xfrm>
-                  <a:off x="1115784" y="4882536"/>
-                  <a:ext cx="368280" cy="401760"/>
-                </a:xfrm>
-                <a:prstGeom prst="rect">
-                  <a:avLst/>
-                </a:prstGeom>
-              </p:spPr>
-            </p:pic>
-          </mc:Fallback>
-        </mc:AlternateContent>
-      </p:grpSp>
-      <p:grpSp>
-        <p:nvGrpSpPr>
-          <p:cNvPr id="24" name="Group 23">
-            <a:extLst>
-              <a:ext uri="{FF2B5EF4-FFF2-40B4-BE49-F238E27FC236}">
-                <a16:creationId xmlns:a16="http://schemas.microsoft.com/office/drawing/2014/main" id="{2C6DF791-4CDF-0861-DED8-221F2C0A34E0}"/>
-              </a:ext>
-            </a:extLst>
-          </p:cNvPr>
-          <p:cNvGrpSpPr/>
-          <p:nvPr/>
-        </p:nvGrpSpPr>
-        <p:grpSpPr>
-          <a:xfrm>
-            <a:off x="2446344" y="4818096"/>
-            <a:ext cx="284760" cy="228240"/>
-            <a:chOff x="2446344" y="4818096"/>
-            <a:chExt cx="284760" cy="228240"/>
-          </a:xfrm>
-        </p:grpSpPr>
-        <mc:AlternateContent xmlns:mc="http://schemas.openxmlformats.org/markup-compatibility/2006" xmlns:p14="http://schemas.microsoft.com/office/powerpoint/2010/main">
-          <mc:Choice Requires="p14">
-            <p:contentPart p14:bwMode="auto" r:id="rId7">
-              <p14:nvContentPartPr>
-                <p14:cNvPr id="19" name="Ink 18">
-                  <a:extLst>
-                    <a:ext uri="{FF2B5EF4-FFF2-40B4-BE49-F238E27FC236}">
-                      <a16:creationId xmlns:a16="http://schemas.microsoft.com/office/drawing/2014/main" id="{496A94C4-A8A3-EB08-C3CE-10BB45BB8DE5}"/>
-                    </a:ext>
-                  </a:extLst>
-                </p14:cNvPr>
-                <p14:cNvContentPartPr/>
-                <p14:nvPr/>
-              </p14:nvContentPartPr>
-              <p14:xfrm>
-                <a:off x="2544984" y="4888656"/>
-                <a:ext cx="153720" cy="104760"/>
-              </p14:xfrm>
-            </p:contentPart>
-          </mc:Choice>
-          <mc:Fallback xmlns="">
-            <p:pic>
-              <p:nvPicPr>
-                <p:cNvPr id="19" name="Ink 18">
-                  <a:extLst>
-                    <a:ext uri="{FF2B5EF4-FFF2-40B4-BE49-F238E27FC236}">
-                      <a16:creationId xmlns:a16="http://schemas.microsoft.com/office/drawing/2014/main" id="{496A94C4-A8A3-EB08-C3CE-10BB45BB8DE5}"/>
-                    </a:ext>
-                  </a:extLst>
-                </p:cNvPr>
-                <p:cNvPicPr/>
-                <p:nvPr/>
-              </p:nvPicPr>
-              <p:blipFill>
-                <a:blip r:embed="rId8"/>
-                <a:stretch>
-                  <a:fillRect/>
-                </a:stretch>
-              </p:blipFill>
-              <p:spPr>
-                <a:xfrm>
-                  <a:off x="2508984" y="4852656"/>
-                  <a:ext cx="225360" cy="176400"/>
-                </a:xfrm>
-                <a:prstGeom prst="rect">
-                  <a:avLst/>
-                </a:prstGeom>
-              </p:spPr>
-            </p:pic>
-          </mc:Fallback>
-        </mc:AlternateContent>
-        <mc:AlternateContent xmlns:mc="http://schemas.openxmlformats.org/markup-compatibility/2006" xmlns:p14="http://schemas.microsoft.com/office/powerpoint/2010/main">
-          <mc:Choice Requires="p14">
-            <p:contentPart p14:bwMode="auto" r:id="rId9">
-              <p14:nvContentPartPr>
-                <p14:cNvPr id="20" name="Ink 19">
-                  <a:extLst>
-                    <a:ext uri="{FF2B5EF4-FFF2-40B4-BE49-F238E27FC236}">
-                      <a16:creationId xmlns:a16="http://schemas.microsoft.com/office/drawing/2014/main" id="{95082C1F-4DCD-CD99-A1C7-8EAFC7BD2F07}"/>
-                    </a:ext>
-                  </a:extLst>
-                </p14:cNvPr>
-                <p14:cNvContentPartPr/>
-                <p14:nvPr/>
-              </p14:nvContentPartPr>
-              <p14:xfrm>
-                <a:off x="2446344" y="4818096"/>
-                <a:ext cx="284760" cy="228240"/>
-              </p14:xfrm>
-            </p:contentPart>
-          </mc:Choice>
-          <mc:Fallback xmlns="">
-            <p:pic>
-              <p:nvPicPr>
-                <p:cNvPr id="20" name="Ink 19">
-                  <a:extLst>
-                    <a:ext uri="{FF2B5EF4-FFF2-40B4-BE49-F238E27FC236}">
-                      <a16:creationId xmlns:a16="http://schemas.microsoft.com/office/drawing/2014/main" id="{95082C1F-4DCD-CD99-A1C7-8EAFC7BD2F07}"/>
-                    </a:ext>
-                  </a:extLst>
-                </p:cNvPr>
-                <p:cNvPicPr/>
-                <p:nvPr/>
-              </p:nvPicPr>
-              <p:blipFill>
-                <a:blip r:embed="rId10"/>
-                <a:stretch>
-                  <a:fillRect/>
-                </a:stretch>
-              </p:blipFill>
-              <p:spPr>
-                <a:xfrm>
-                  <a:off x="2410704" y="4782096"/>
-                  <a:ext cx="356400" cy="299880"/>
-                </a:xfrm>
-                <a:prstGeom prst="rect">
-                  <a:avLst/>
-                </a:prstGeom>
-              </p:spPr>
-            </p:pic>
-          </mc:Fallback>
-        </mc:AlternateContent>
-      </p:grpSp>
-      <p:grpSp>
-        <p:nvGrpSpPr>
-          <p:cNvPr id="23" name="Group 22">
-            <a:extLst>
-              <a:ext uri="{FF2B5EF4-FFF2-40B4-BE49-F238E27FC236}">
-                <a16:creationId xmlns:a16="http://schemas.microsoft.com/office/drawing/2014/main" id="{015CEBE3-659B-636E-DFA0-F19A2E30740B}"/>
-              </a:ext>
-            </a:extLst>
-          </p:cNvPr>
-          <p:cNvGrpSpPr/>
-          <p:nvPr/>
-        </p:nvGrpSpPr>
-        <p:grpSpPr>
-          <a:xfrm>
-            <a:off x="3546144" y="4783536"/>
-            <a:ext cx="371520" cy="278640"/>
-            <a:chOff x="3546144" y="4783536"/>
-            <a:chExt cx="371520" cy="278640"/>
-          </a:xfrm>
-        </p:grpSpPr>
-        <mc:AlternateContent xmlns:mc="http://schemas.openxmlformats.org/markup-compatibility/2006" xmlns:p14="http://schemas.microsoft.com/office/powerpoint/2010/main">
-          <mc:Choice Requires="p14">
-            <p:contentPart p14:bwMode="auto" r:id="rId11">
-              <p14:nvContentPartPr>
-                <p14:cNvPr id="21" name="Ink 20">
-                  <a:extLst>
-                    <a:ext uri="{FF2B5EF4-FFF2-40B4-BE49-F238E27FC236}">
-                      <a16:creationId xmlns:a16="http://schemas.microsoft.com/office/drawing/2014/main" id="{003C6BC4-70D9-5A40-9C97-76F5285124A5}"/>
-                    </a:ext>
-                  </a:extLst>
-                </p14:cNvPr>
-                <p14:cNvContentPartPr/>
-                <p14:nvPr/>
-              </p14:nvContentPartPr>
-              <p14:xfrm>
-                <a:off x="3672144" y="4865256"/>
-                <a:ext cx="166320" cy="131040"/>
-              </p14:xfrm>
-            </p:contentPart>
-          </mc:Choice>
-          <mc:Fallback xmlns="">
-            <p:pic>
-              <p:nvPicPr>
-                <p:cNvPr id="21" name="Ink 20">
-                  <a:extLst>
-                    <a:ext uri="{FF2B5EF4-FFF2-40B4-BE49-F238E27FC236}">
-                      <a16:creationId xmlns:a16="http://schemas.microsoft.com/office/drawing/2014/main" id="{003C6BC4-70D9-5A40-9C97-76F5285124A5}"/>
-                    </a:ext>
-                  </a:extLst>
-                </p:cNvPr>
-                <p:cNvPicPr/>
-                <p:nvPr/>
-              </p:nvPicPr>
-              <p:blipFill>
-                <a:blip r:embed="rId12"/>
-                <a:stretch>
-                  <a:fillRect/>
-                </a:stretch>
-              </p:blipFill>
-              <p:spPr>
-                <a:xfrm>
-                  <a:off x="3636144" y="4829256"/>
-                  <a:ext cx="237960" cy="202680"/>
-                </a:xfrm>
-                <a:prstGeom prst="rect">
-                  <a:avLst/>
-                </a:prstGeom>
-              </p:spPr>
-            </p:pic>
-          </mc:Fallback>
-        </mc:AlternateContent>
-        <mc:AlternateContent xmlns:mc="http://schemas.openxmlformats.org/markup-compatibility/2006" xmlns:p14="http://schemas.microsoft.com/office/powerpoint/2010/main">
-          <mc:Choice Requires="p14">
-            <p:contentPart p14:bwMode="auto" r:id="rId13">
-              <p14:nvContentPartPr>
-                <p14:cNvPr id="22" name="Ink 21">
-                  <a:extLst>
-                    <a:ext uri="{FF2B5EF4-FFF2-40B4-BE49-F238E27FC236}">
-                      <a16:creationId xmlns:a16="http://schemas.microsoft.com/office/drawing/2014/main" id="{465E2FB5-BD90-07B7-067D-98D0E07D0168}"/>
-                    </a:ext>
-                  </a:extLst>
-                </p14:cNvPr>
-                <p14:cNvContentPartPr/>
-                <p14:nvPr/>
-              </p14:nvContentPartPr>
-              <p14:xfrm>
-                <a:off x="3546144" y="4783536"/>
-                <a:ext cx="371520" cy="278640"/>
-              </p14:xfrm>
-            </p:contentPart>
-          </mc:Choice>
-          <mc:Fallback xmlns="">
-            <p:pic>
-              <p:nvPicPr>
-                <p:cNvPr id="22" name="Ink 21">
-                  <a:extLst>
-                    <a:ext uri="{FF2B5EF4-FFF2-40B4-BE49-F238E27FC236}">
-                      <a16:creationId xmlns:a16="http://schemas.microsoft.com/office/drawing/2014/main" id="{465E2FB5-BD90-07B7-067D-98D0E07D0168}"/>
-                    </a:ext>
-                  </a:extLst>
-                </p:cNvPr>
-                <p:cNvPicPr/>
-                <p:nvPr/>
-              </p:nvPicPr>
-              <p:blipFill>
-                <a:blip r:embed="rId14"/>
-                <a:stretch>
-                  <a:fillRect/>
-                </a:stretch>
-              </p:blipFill>
-              <p:spPr>
-                <a:xfrm>
-                  <a:off x="3510504" y="4747896"/>
-                  <a:ext cx="443160" cy="350280"/>
-                </a:xfrm>
-                <a:prstGeom prst="rect">
-                  <a:avLst/>
-                </a:prstGeom>
-              </p:spPr>
-            </p:pic>
-          </mc:Fallback>
-        </mc:AlternateContent>
-      </p:grpSp>
-      <p:grpSp>
-        <p:nvGrpSpPr>
-          <p:cNvPr id="28" name="Group 27">
-            <a:extLst>
-              <a:ext uri="{FF2B5EF4-FFF2-40B4-BE49-F238E27FC236}">
-                <a16:creationId xmlns:a16="http://schemas.microsoft.com/office/drawing/2014/main" id="{60C11632-78C2-A3A6-2FEF-239BB5EA9D96}"/>
-              </a:ext>
-            </a:extLst>
-          </p:cNvPr>
-          <p:cNvGrpSpPr/>
-          <p:nvPr/>
-        </p:nvGrpSpPr>
-        <p:grpSpPr>
-          <a:xfrm>
-            <a:off x="4928904" y="5097456"/>
-            <a:ext cx="330120" cy="320400"/>
-            <a:chOff x="4928904" y="5097456"/>
-            <a:chExt cx="330120" cy="320400"/>
-          </a:xfrm>
-        </p:grpSpPr>
-        <mc:AlternateContent xmlns:mc="http://schemas.openxmlformats.org/markup-compatibility/2006" xmlns:p14="http://schemas.microsoft.com/office/powerpoint/2010/main">
-          <mc:Choice Requires="p14">
-            <p:contentPart p14:bwMode="auto" r:id="rId15">
-              <p14:nvContentPartPr>
-                <p14:cNvPr id="26" name="Ink 25">
-                  <a:extLst>
-                    <a:ext uri="{FF2B5EF4-FFF2-40B4-BE49-F238E27FC236}">
-                      <a16:creationId xmlns:a16="http://schemas.microsoft.com/office/drawing/2014/main" id="{E3289346-5E6D-EA3D-BF71-4216B61696A4}"/>
-                    </a:ext>
-                  </a:extLst>
-                </p14:cNvPr>
-                <p14:cNvContentPartPr/>
-                <p14:nvPr/>
-              </p14:nvContentPartPr>
-              <p14:xfrm>
-                <a:off x="5025024" y="5169816"/>
-                <a:ext cx="97920" cy="189360"/>
-              </p14:xfrm>
-            </p:contentPart>
-          </mc:Choice>
-          <mc:Fallback xmlns="">
-            <p:pic>
-              <p:nvPicPr>
-                <p:cNvPr id="26" name="Ink 25">
-                  <a:extLst>
-                    <a:ext uri="{FF2B5EF4-FFF2-40B4-BE49-F238E27FC236}">
-                      <a16:creationId xmlns:a16="http://schemas.microsoft.com/office/drawing/2014/main" id="{E3289346-5E6D-EA3D-BF71-4216B61696A4}"/>
-                    </a:ext>
-                  </a:extLst>
-                </p:cNvPr>
-                <p:cNvPicPr/>
-                <p:nvPr/>
-              </p:nvPicPr>
-              <p:blipFill>
-                <a:blip r:embed="rId16"/>
-                <a:stretch>
-                  <a:fillRect/>
-                </a:stretch>
-              </p:blipFill>
-              <p:spPr>
-                <a:xfrm>
-                  <a:off x="4989024" y="5134176"/>
-                  <a:ext cx="169560" cy="261000"/>
-                </a:xfrm>
-                <a:prstGeom prst="rect">
-                  <a:avLst/>
-                </a:prstGeom>
-              </p:spPr>
-            </p:pic>
-          </mc:Fallback>
-        </mc:AlternateContent>
-        <mc:AlternateContent xmlns:mc="http://schemas.openxmlformats.org/markup-compatibility/2006" xmlns:p14="http://schemas.microsoft.com/office/powerpoint/2010/main">
-          <mc:Choice Requires="p14">
-            <p:contentPart p14:bwMode="auto" r:id="rId17">
-              <p14:nvContentPartPr>
-                <p14:cNvPr id="27" name="Ink 26">
-                  <a:extLst>
-                    <a:ext uri="{FF2B5EF4-FFF2-40B4-BE49-F238E27FC236}">
-                      <a16:creationId xmlns:a16="http://schemas.microsoft.com/office/drawing/2014/main" id="{723C545A-AD16-72DB-5B74-DBBA99146E1A}"/>
-                    </a:ext>
-                  </a:extLst>
-                </p14:cNvPr>
-                <p14:cNvContentPartPr/>
-                <p14:nvPr/>
-              </p14:nvContentPartPr>
-              <p14:xfrm>
-                <a:off x="4928904" y="5097456"/>
-                <a:ext cx="330120" cy="320400"/>
-              </p14:xfrm>
-            </p:contentPart>
-          </mc:Choice>
-          <mc:Fallback xmlns="">
-            <p:pic>
-              <p:nvPicPr>
-                <p:cNvPr id="27" name="Ink 26">
-                  <a:extLst>
-                    <a:ext uri="{FF2B5EF4-FFF2-40B4-BE49-F238E27FC236}">
-                      <a16:creationId xmlns:a16="http://schemas.microsoft.com/office/drawing/2014/main" id="{723C545A-AD16-72DB-5B74-DBBA99146E1A}"/>
-                    </a:ext>
-                  </a:extLst>
-                </p:cNvPr>
-                <p:cNvPicPr/>
-                <p:nvPr/>
-              </p:nvPicPr>
-              <p:blipFill>
-                <a:blip r:embed="rId18"/>
-                <a:stretch>
-                  <a:fillRect/>
-                </a:stretch>
-              </p:blipFill>
-              <p:spPr>
-                <a:xfrm>
-                  <a:off x="4893264" y="5061816"/>
-                  <a:ext cx="401760" cy="392040"/>
-                </a:xfrm>
-                <a:prstGeom prst="rect">
-                  <a:avLst/>
-                </a:prstGeom>
-              </p:spPr>
-            </p:pic>
-          </mc:Fallback>
-        </mc:AlternateContent>
-      </p:grpSp>
     </p:spTree>
     <p:extLst>
       <p:ext uri="{BB962C8B-B14F-4D97-AF65-F5344CB8AC3E}">
